--- a/_wp移行素材/★引継ぎ資料/★ASPATH_サイト運用マニュアル_応用編.pptx
+++ b/_wp移行素材/★引継ぎ資料/★ASPATH_サイト運用マニュアル_応用編.pptx
@@ -2192,7 +2192,7 @@
     <p:bg>
       <p:bgPr>
         <a:solidFill>
-          <a:srgbClr val="264653"/>
+          <a:srgbClr val="F4E9D8"/>
         </a:solidFill>
       </p:bgPr>
     </p:bg>
@@ -2212,14 +2212,78 @@
       </p:grpSpPr>
       <p:sp>
         <p:nvSpPr>
-          <p:cNvPr id="2" name="Text 0"/>
-          <p:cNvSpPr txBox="1"/>
-          <p:nvPr/>
-        </p:nvSpPr>
-        <p:spPr>
-          <a:xfrm>
-            <a:off x="822960" y="1325880"/>
-            <a:ext cx="7315200" cy="457200"/>
+          <p:cNvPr id="2" name="Shape 0"/>
+          <p:cNvSpPr/>
+          <p:nvPr/>
+        </p:nvSpPr>
+        <p:spPr>
+          <a:xfrm>
+            <a:off x="0" y="0"/>
+            <a:ext cx="12198096" cy="146304"/>
+          </a:xfrm>
+          <a:prstGeom prst="rect">
+            <a:avLst/>
+          </a:prstGeom>
+          <a:solidFill>
+            <a:srgbClr val="264653"/>
+          </a:solidFill>
+          <a:ln/>
+        </p:spPr>
+      </p:sp>
+      <p:sp>
+        <p:nvSpPr>
+          <p:cNvPr id="3" name="Shape 1"/>
+          <p:cNvSpPr/>
+          <p:nvPr/>
+        </p:nvSpPr>
+        <p:spPr>
+          <a:xfrm>
+            <a:off x="0" y="6711696"/>
+            <a:ext cx="12198096" cy="146304"/>
+          </a:xfrm>
+          <a:prstGeom prst="rect">
+            <a:avLst/>
+          </a:prstGeom>
+          <a:solidFill>
+            <a:srgbClr val="F4A261"/>
+          </a:solidFill>
+          <a:ln/>
+        </p:spPr>
+      </p:sp>
+      <p:pic>
+        <p:nvPicPr>
+          <p:cNvPr id="4" name="Image 0" descr="/sessions/compassionate-sweet-heisenberg/mnt/dev-aspath-life-main/tools/assets/logo-deck.png">    </p:cNvPr>
+          <p:cNvPicPr>
+            <a:picLocks noChangeAspect="1"/>
+          </p:cNvPicPr>
+          <p:nvPr/>
+        </p:nvPicPr>
+        <p:blipFill>
+          <a:blip r:embed="rId1"/>
+          <a:stretch>
+            <a:fillRect/>
+          </a:stretch>
+        </p:blipFill>
+        <p:spPr>
+          <a:xfrm>
+            <a:off x="1051560" y="1874520"/>
+            <a:ext cx="2320246" cy="2834640"/>
+          </a:xfrm>
+          <a:prstGeom prst="rect">
+            <a:avLst/>
+          </a:prstGeom>
+        </p:spPr>
+      </p:pic>
+      <p:sp>
+        <p:nvSpPr>
+          <p:cNvPr id="5" name="Text 2"/>
+          <p:cNvSpPr txBox="1"/>
+          <p:nvPr/>
+        </p:nvSpPr>
+        <p:spPr>
+          <a:xfrm>
+            <a:off x="4892040" y="1572768"/>
+            <a:ext cx="6675120" cy="384048"/>
           </a:xfrm>
           <a:prstGeom prst="rect">
             <a:avLst/>
@@ -2235,7 +2299,7 @@
               <a:buNone/>
             </a:pPr>
             <a:r>
-              <a:rPr lang="en-US" sz="1700" b="1" spc="600" kern="0" dirty="0">
+              <a:rPr lang="en-US" sz="1500" b="1" spc="600" kern="0" dirty="0">
                 <a:solidFill>
                   <a:srgbClr val="F4A261"/>
                 </a:solidFill>
@@ -2245,20 +2309,20 @@
               </a:rPr>
               <a:t>ASPATH</a:t>
             </a:r>
-            <a:endParaRPr lang="en-US" sz="1700" dirty="0"/>
-          </a:p>
-        </p:txBody>
-      </p:sp>
-      <p:sp>
-        <p:nvSpPr>
-          <p:cNvPr id="3" name="Text 1"/>
-          <p:cNvSpPr txBox="1"/>
-          <p:nvPr/>
-        </p:nvSpPr>
-        <p:spPr>
-          <a:xfrm>
-            <a:off x="822960" y="1874520"/>
-            <a:ext cx="10058400" cy="868680"/>
+            <a:endParaRPr lang="en-US" sz="1500" dirty="0"/>
+          </a:p>
+        </p:txBody>
+      </p:sp>
+      <p:sp>
+        <p:nvSpPr>
+          <p:cNvPr id="6" name="Text 3"/>
+          <p:cNvSpPr txBox="1"/>
+          <p:nvPr/>
+        </p:nvSpPr>
+        <p:spPr>
+          <a:xfrm>
+            <a:off x="4892040" y="1993392"/>
+            <a:ext cx="6675120" cy="914400"/>
           </a:xfrm>
           <a:prstGeom prst="rect">
             <a:avLst/>
@@ -2271,12 +2335,15 @@
           <a:lstStyle/>
           <a:p>
             <a:pPr indent="0" marL="0">
-              <a:buNone/>
-            </a:pPr>
-            <a:r>
-              <a:rPr lang="en-US" sz="4200" b="1" dirty="0">
-                <a:solidFill>
-                  <a:srgbClr val="FFFFFF"/>
+              <a:lnSpc>
+                <a:spcPct val="120000"/>
+              </a:lnSpc>
+              <a:buNone/>
+            </a:pPr>
+            <a:r>
+              <a:rPr lang="en-US" sz="3600" b="1" dirty="0">
+                <a:solidFill>
+                  <a:srgbClr val="264653"/>
                 </a:solidFill>
                 <a:latin typeface="Meiryo" pitchFamily="34" charset="0"/>
                 <a:ea typeface="Meiryo" pitchFamily="34" charset="-122"/>
@@ -2284,20 +2351,20 @@
               </a:rPr>
               <a:t>サイト運用マニュアル</a:t>
             </a:r>
-            <a:endParaRPr lang="en-US" sz="4200" dirty="0"/>
-          </a:p>
-        </p:txBody>
-      </p:sp>
-      <p:sp>
-        <p:nvSpPr>
-          <p:cNvPr id="4" name="Shape 2"/>
+            <a:endParaRPr lang="en-US" sz="3600" dirty="0"/>
+          </a:p>
+        </p:txBody>
+      </p:sp>
+      <p:sp>
+        <p:nvSpPr>
+          <p:cNvPr id="7" name="Shape 4"/>
           <p:cNvSpPr/>
           <p:nvPr/>
         </p:nvSpPr>
         <p:spPr>
           <a:xfrm>
-            <a:off x="822960" y="2926080"/>
-            <a:ext cx="1920240" cy="585216"/>
+            <a:off x="4892040" y="2962656"/>
+            <a:ext cx="1920240" cy="548640"/>
           </a:xfrm>
           <a:prstGeom prst="roundRect">
             <a:avLst>
@@ -2312,14 +2379,14 @@
       </p:sp>
       <p:sp>
         <p:nvSpPr>
-          <p:cNvPr id="5" name="Text 3"/>
-          <p:cNvSpPr txBox="1"/>
-          <p:nvPr/>
-        </p:nvSpPr>
-        <p:spPr>
-          <a:xfrm>
-            <a:off x="822960" y="2926080"/>
-            <a:ext cx="1920240" cy="585216"/>
+          <p:cNvPr id="8" name="Text 5"/>
+          <p:cNvSpPr txBox="1"/>
+          <p:nvPr/>
+        </p:nvSpPr>
+        <p:spPr>
+          <a:xfrm>
+            <a:off x="4892040" y="2962656"/>
+            <a:ext cx="1920240" cy="548640"/>
           </a:xfrm>
           <a:prstGeom prst="rect">
             <a:avLst/>
@@ -2335,7 +2402,7 @@
               <a:buNone/>
             </a:pPr>
             <a:r>
-              <a:rPr lang="en-US" sz="1800" b="1" dirty="0">
+              <a:rPr lang="en-US" sz="1700" b="1" dirty="0">
                 <a:solidFill>
                   <a:srgbClr val="FFFFFF"/>
                 </a:solidFill>
@@ -2345,20 +2412,20 @@
               </a:rPr>
               <a:t>応 用 編</a:t>
             </a:r>
-            <a:endParaRPr lang="en-US" sz="1800" dirty="0"/>
-          </a:p>
-        </p:txBody>
-      </p:sp>
-      <p:sp>
-        <p:nvSpPr>
-          <p:cNvPr id="6" name="Text 4"/>
-          <p:cNvSpPr txBox="1"/>
-          <p:nvPr/>
-        </p:nvSpPr>
-        <p:spPr>
-          <a:xfrm>
-            <a:off x="822960" y="3794760"/>
-            <a:ext cx="10058400" cy="411480"/>
+            <a:endParaRPr lang="en-US" sz="1700" dirty="0"/>
+          </a:p>
+        </p:txBody>
+      </p:sp>
+      <p:sp>
+        <p:nvSpPr>
+          <p:cNvPr id="9" name="Text 6"/>
+          <p:cNvSpPr txBox="1"/>
+          <p:nvPr/>
+        </p:nvSpPr>
+        <p:spPr>
+          <a:xfrm>
+            <a:off x="4892040" y="3749040"/>
+            <a:ext cx="6675120" cy="548640"/>
           </a:xfrm>
           <a:prstGeom prst="rect">
             <a:avLst/>
@@ -2371,12 +2438,15 @@
           <a:lstStyle/>
           <a:p>
             <a:pPr indent="0" marL="0">
-              <a:buNone/>
-            </a:pPr>
-            <a:r>
-              <a:rPr lang="en-US" sz="1600" dirty="0">
-                <a:solidFill>
-                  <a:srgbClr val="CFE0E4"/>
+              <a:lnSpc>
+                <a:spcPct val="130000"/>
+              </a:lnSpc>
+              <a:buNone/>
+            </a:pPr>
+            <a:r>
+              <a:rPr lang="en-US" sz="1500" dirty="0">
+                <a:solidFill>
+                  <a:srgbClr val="52707A"/>
                 </a:solidFill>
                 <a:latin typeface="Meiryo" pitchFamily="34" charset="0"/>
                 <a:ea typeface="Meiryo" pitchFamily="34" charset="-122"/>
@@ -2384,20 +2454,40 @@
               </a:rPr>
               <a:t>壊さない触り方と、やっておいて損はないこと</a:t>
             </a:r>
-            <a:endParaRPr lang="en-US" sz="1600" dirty="0"/>
-          </a:p>
-        </p:txBody>
-      </p:sp>
-      <p:sp>
-        <p:nvSpPr>
-          <p:cNvPr id="7" name="Text 5"/>
-          <p:cNvSpPr txBox="1"/>
-          <p:nvPr/>
-        </p:nvSpPr>
-        <p:spPr>
-          <a:xfrm>
-            <a:off x="822960" y="5760720"/>
-            <a:ext cx="7315200" cy="365760"/>
+            <a:endParaRPr lang="en-US" sz="1500" dirty="0"/>
+          </a:p>
+        </p:txBody>
+      </p:sp>
+      <p:sp>
+        <p:nvSpPr>
+          <p:cNvPr id="10" name="Shape 7"/>
+          <p:cNvSpPr/>
+          <p:nvPr/>
+        </p:nvSpPr>
+        <p:spPr>
+          <a:xfrm>
+            <a:off x="4892040" y="4736592"/>
+            <a:ext cx="1828800" cy="18288"/>
+          </a:xfrm>
+          <a:prstGeom prst="rect">
+            <a:avLst/>
+          </a:prstGeom>
+          <a:solidFill>
+            <a:srgbClr val="F4A261"/>
+          </a:solidFill>
+          <a:ln/>
+        </p:spPr>
+      </p:sp>
+      <p:sp>
+        <p:nvSpPr>
+          <p:cNvPr id="11" name="Text 8"/>
+          <p:cNvSpPr txBox="1"/>
+          <p:nvPr/>
+        </p:nvSpPr>
+        <p:spPr>
+          <a:xfrm>
+            <a:off x="4892040" y="4864608"/>
+            <a:ext cx="6675120" cy="292608"/>
           </a:xfrm>
           <a:prstGeom prst="rect">
             <a:avLst/>
@@ -2413,17 +2503,95 @@
               <a:buNone/>
             </a:pPr>
             <a:r>
-              <a:rPr lang="en-US" sz="1200" dirty="0">
-                <a:solidFill>
-                  <a:srgbClr val="9FBAC1"/>
-                </a:solidFill>
-                <a:latin typeface="Meiryo" pitchFamily="34" charset="0"/>
-                <a:ea typeface="Meiryo" pitchFamily="34" charset="-122"/>
-                <a:cs typeface="Meiryo" pitchFamily="34" charset="-120"/>
-              </a:rPr>
-              <a:t>2026年9月　ASPATH 様　ご納品資料</a:t>
-            </a:r>
-            <a:endParaRPr lang="en-US" sz="1200" dirty="0"/>
+              <a:rPr lang="en-US" sz="1250" b="1" dirty="0">
+                <a:solidFill>
+                  <a:srgbClr val="264653"/>
+                </a:solidFill>
+                <a:latin typeface="Meiryo" pitchFamily="34" charset="0"/>
+                <a:ea typeface="Meiryo" pitchFamily="34" charset="-122"/>
+                <a:cs typeface="Meiryo" pitchFamily="34" charset="-120"/>
+              </a:rPr>
+              <a:t>鹿児島のパーキンソン病専門トレーニングスタジオ</a:t>
+            </a:r>
+            <a:endParaRPr lang="en-US" sz="1250" dirty="0"/>
+          </a:p>
+        </p:txBody>
+      </p:sp>
+      <p:sp>
+        <p:nvSpPr>
+          <p:cNvPr id="12" name="Text 9"/>
+          <p:cNvSpPr txBox="1"/>
+          <p:nvPr/>
+        </p:nvSpPr>
+        <p:spPr>
+          <a:xfrm>
+            <a:off x="4892040" y="5193792"/>
+            <a:ext cx="6675120" cy="274320"/>
+          </a:xfrm>
+          <a:prstGeom prst="rect">
+            <a:avLst/>
+          </a:prstGeom>
+          <a:noFill/>
+          <a:ln/>
+        </p:spPr>
+        <p:txBody>
+          <a:bodyPr wrap="square" lIns="0" tIns="0" rIns="0" bIns="0" rtlCol="0" anchor="ctr"/>
+          <a:lstStyle/>
+          <a:p>
+            <a:pPr indent="0" marL="0">
+              <a:buNone/>
+            </a:pPr>
+            <a:r>
+              <a:rPr lang="en-US" sz="1150" dirty="0">
+                <a:solidFill>
+                  <a:srgbClr val="52707A"/>
+                </a:solidFill>
+                <a:latin typeface="Meiryo" pitchFamily="34" charset="0"/>
+                <a:ea typeface="Meiryo" pitchFamily="34" charset="-122"/>
+                <a:cs typeface="Meiryo" pitchFamily="34" charset="-120"/>
+              </a:rPr>
+              <a:t>動くことを楽しむ。明日につながる。</a:t>
+            </a:r>
+            <a:endParaRPr lang="en-US" sz="1150" dirty="0"/>
+          </a:p>
+        </p:txBody>
+      </p:sp>
+      <p:sp>
+        <p:nvSpPr>
+          <p:cNvPr id="13" name="Text 10"/>
+          <p:cNvSpPr txBox="1"/>
+          <p:nvPr/>
+        </p:nvSpPr>
+        <p:spPr>
+          <a:xfrm>
+            <a:off x="4892040" y="5596128"/>
+            <a:ext cx="6675120" cy="274320"/>
+          </a:xfrm>
+          <a:prstGeom prst="rect">
+            <a:avLst/>
+          </a:prstGeom>
+          <a:noFill/>
+          <a:ln/>
+        </p:spPr>
+        <p:txBody>
+          <a:bodyPr wrap="square" lIns="0" tIns="0" rIns="0" bIns="0" rtlCol="0" anchor="ctr"/>
+          <a:lstStyle/>
+          <a:p>
+            <a:pPr indent="0" marL="0">
+              <a:buNone/>
+            </a:pPr>
+            <a:r>
+              <a:rPr lang="en-US" sz="1050" dirty="0">
+                <a:solidFill>
+                  <a:srgbClr val="8A9CA2"/>
+                </a:solidFill>
+                <a:latin typeface="Meiryo" pitchFamily="34" charset="0"/>
+                <a:ea typeface="Meiryo" pitchFamily="34" charset="-122"/>
+                <a:cs typeface="Meiryo" pitchFamily="34" charset="-120"/>
+              </a:rPr>
+              <a:t>aspath-life.com　／　2026年9月　ASPATH 様　ご納品資料</a:t>
+            </a:r>
+            <a:endParaRPr lang="en-US" sz="1050" dirty="0"/>
           </a:p>
         </p:txBody>
       </p:sp>
@@ -2459,9 +2627,72 @@
           <a:chExt cx="0" cy="0"/>
         </a:xfrm>
       </p:grpSpPr>
-      <p:sp>
-        <p:nvSpPr>
-          <p:cNvPr id="2" name="Shape 0"/>
+      <p:pic>
+        <p:nvPicPr>
+          <p:cNvPr id="2" name="Image 0" descr="/sessions/compassionate-sweet-heisenberg/mnt/dev-aspath-life-main/tools/assets/logo-deck.png">    </p:cNvPr>
+          <p:cNvPicPr>
+            <a:picLocks noChangeAspect="1"/>
+          </p:cNvPicPr>
+          <p:nvPr/>
+        </p:nvPicPr>
+        <p:blipFill>
+          <a:blip r:embed="rId1"/>
+          <a:stretch>
+            <a:fillRect/>
+          </a:stretch>
+        </p:blipFill>
+        <p:spPr>
+          <a:xfrm>
+            <a:off x="11458173" y="109728"/>
+            <a:ext cx="209571" cy="256032"/>
+          </a:xfrm>
+          <a:prstGeom prst="rect">
+            <a:avLst/>
+          </a:prstGeom>
+        </p:spPr>
+      </p:pic>
+      <p:sp>
+        <p:nvSpPr>
+          <p:cNvPr id="3" name="Text 0"/>
+          <p:cNvSpPr txBox="1"/>
+          <p:nvPr/>
+        </p:nvSpPr>
+        <p:spPr>
+          <a:xfrm>
+            <a:off x="8623533" y="128016"/>
+            <a:ext cx="2743200" cy="237744"/>
+          </a:xfrm>
+          <a:prstGeom prst="rect">
+            <a:avLst/>
+          </a:prstGeom>
+          <a:noFill/>
+          <a:ln/>
+        </p:spPr>
+        <p:txBody>
+          <a:bodyPr wrap="square" lIns="0" tIns="0" rIns="0" bIns="0" rtlCol="0" anchor="ctr"/>
+          <a:lstStyle/>
+          <a:p>
+            <a:pPr algn="r" indent="0" marL="0">
+              <a:buNone/>
+            </a:pPr>
+            <a:r>
+              <a:rPr lang="en-US" sz="750" dirty="0">
+                <a:solidFill>
+                  <a:srgbClr val="97A9AF"/>
+                </a:solidFill>
+                <a:latin typeface="Meiryo" pitchFamily="34" charset="0"/>
+                <a:ea typeface="Meiryo" pitchFamily="34" charset="-122"/>
+                <a:cs typeface="Meiryo" pitchFamily="34" charset="-120"/>
+              </a:rPr>
+              <a:t>鹿児島のパーキンソン病専門トレーニングスタジオ</a:t>
+            </a:r>
+            <a:endParaRPr lang="en-US" sz="750" dirty="0"/>
+          </a:p>
+        </p:txBody>
+      </p:sp>
+      <p:sp>
+        <p:nvSpPr>
+          <p:cNvPr id="4" name="Shape 1"/>
           <p:cNvSpPr/>
           <p:nvPr/>
         </p:nvSpPr>
@@ -2483,7 +2714,7 @@
       </p:sp>
       <p:sp>
         <p:nvSpPr>
-          <p:cNvPr id="3" name="Text 1"/>
+          <p:cNvPr id="5" name="Text 2"/>
           <p:cNvSpPr txBox="1"/>
           <p:nvPr/>
         </p:nvSpPr>
@@ -2522,7 +2753,7 @@
       </p:sp>
       <p:sp>
         <p:nvSpPr>
-          <p:cNvPr id="4" name="Text 2"/>
+          <p:cNvPr id="6" name="Text 3"/>
           <p:cNvSpPr txBox="1"/>
           <p:nvPr/>
         </p:nvSpPr>
@@ -2561,7 +2792,7 @@
       </p:sp>
       <p:sp>
         <p:nvSpPr>
-          <p:cNvPr id="5" name="Text 3"/>
+          <p:cNvPr id="7" name="Text 4"/>
           <p:cNvSpPr txBox="1"/>
           <p:nvPr/>
         </p:nvSpPr>
@@ -2600,7 +2831,7 @@
       </p:sp>
       <p:sp>
         <p:nvSpPr>
-          <p:cNvPr id="6" name="Text 4"/>
+          <p:cNvPr id="8" name="Text 5"/>
           <p:cNvSpPr txBox="1"/>
           <p:nvPr/>
         </p:nvSpPr>
@@ -2639,7 +2870,7 @@
       </p:sp>
       <p:sp>
         <p:nvSpPr>
-          <p:cNvPr id="7" name="Shape 5"/>
+          <p:cNvPr id="9" name="Shape 6"/>
           <p:cNvSpPr/>
           <p:nvPr/>
         </p:nvSpPr>
@@ -2659,7 +2890,7 @@
       </p:sp>
       <p:sp>
         <p:nvSpPr>
-          <p:cNvPr id="8" name="Text 6"/>
+          <p:cNvPr id="10" name="Text 7"/>
           <p:cNvSpPr txBox="1"/>
           <p:nvPr/>
         </p:nvSpPr>
@@ -2698,7 +2929,7 @@
       </p:sp>
       <p:sp>
         <p:nvSpPr>
-          <p:cNvPr id="9" name="Text 7"/>
+          <p:cNvPr id="11" name="Text 8"/>
           <p:cNvSpPr txBox="1"/>
           <p:nvPr/>
         </p:nvSpPr>
@@ -2743,7 +2974,7 @@
       </p:sp>
       <p:sp>
         <p:nvSpPr>
-          <p:cNvPr id="10" name="Shape 8"/>
+          <p:cNvPr id="12" name="Shape 9"/>
           <p:cNvSpPr/>
           <p:nvPr/>
         </p:nvSpPr>
@@ -2763,7 +2994,7 @@
       </p:sp>
       <p:sp>
         <p:nvSpPr>
-          <p:cNvPr id="11" name="Text 9"/>
+          <p:cNvPr id="13" name="Text 10"/>
           <p:cNvSpPr txBox="1"/>
           <p:nvPr/>
         </p:nvSpPr>
@@ -2802,7 +3033,7 @@
       </p:sp>
       <p:sp>
         <p:nvSpPr>
-          <p:cNvPr id="12" name="Text 10"/>
+          <p:cNvPr id="14" name="Text 11"/>
           <p:cNvSpPr txBox="1"/>
           <p:nvPr/>
         </p:nvSpPr>
@@ -2858,7 +3089,7 @@
       </p:sp>
       <p:sp>
         <p:nvSpPr>
-          <p:cNvPr id="13" name="Shape 11"/>
+          <p:cNvPr id="15" name="Shape 12"/>
           <p:cNvSpPr/>
           <p:nvPr/>
         </p:nvSpPr>
@@ -2878,7 +3109,7 @@
       </p:sp>
       <p:sp>
         <p:nvSpPr>
-          <p:cNvPr id="14" name="Text 12"/>
+          <p:cNvPr id="16" name="Text 13"/>
           <p:cNvSpPr txBox="1"/>
           <p:nvPr/>
         </p:nvSpPr>
@@ -2917,7 +3148,7 @@
       </p:sp>
       <p:sp>
         <p:nvSpPr>
-          <p:cNvPr id="15" name="Text 13"/>
+          <p:cNvPr id="17" name="Text 14"/>
           <p:cNvSpPr txBox="1"/>
           <p:nvPr/>
         </p:nvSpPr>
@@ -2973,7 +3204,7 @@
       </p:sp>
       <p:sp>
         <p:nvSpPr>
-          <p:cNvPr id="16" name="Shape 14"/>
+          <p:cNvPr id="18" name="Shape 15"/>
           <p:cNvSpPr/>
           <p:nvPr/>
         </p:nvSpPr>
@@ -2993,7 +3224,7 @@
       </p:sp>
       <p:sp>
         <p:nvSpPr>
-          <p:cNvPr id="17" name="Text 15"/>
+          <p:cNvPr id="19" name="Text 16"/>
           <p:cNvSpPr txBox="1"/>
           <p:nvPr/>
         </p:nvSpPr>
@@ -3032,7 +3263,7 @@
       </p:sp>
       <p:sp>
         <p:nvSpPr>
-          <p:cNvPr id="18" name="Text 16"/>
+          <p:cNvPr id="20" name="Text 17"/>
           <p:cNvSpPr txBox="1"/>
           <p:nvPr/>
         </p:nvSpPr>
@@ -3088,7 +3319,7 @@
       </p:sp>
       <p:sp>
         <p:nvSpPr>
-          <p:cNvPr id="19" name="Shape 17"/>
+          <p:cNvPr id="21" name="Shape 18"/>
           <p:cNvSpPr/>
           <p:nvPr/>
         </p:nvSpPr>
@@ -3108,7 +3339,7 @@
       </p:sp>
       <p:sp>
         <p:nvSpPr>
-          <p:cNvPr id="20" name="Text 18"/>
+          <p:cNvPr id="22" name="Text 19"/>
           <p:cNvSpPr txBox="1"/>
           <p:nvPr/>
         </p:nvSpPr>
@@ -3147,7 +3378,7 @@
       </p:sp>
       <p:sp>
         <p:nvSpPr>
-          <p:cNvPr id="21" name="Text 19"/>
+          <p:cNvPr id="23" name="Text 20"/>
           <p:cNvSpPr txBox="1"/>
           <p:nvPr/>
         </p:nvSpPr>
@@ -3203,7 +3434,7 @@
       </p:sp>
       <p:sp>
         <p:nvSpPr>
-          <p:cNvPr id="22" name="Shape 20"/>
+          <p:cNvPr id="24" name="Shape 21"/>
           <p:cNvSpPr/>
           <p:nvPr/>
         </p:nvSpPr>
@@ -3230,7 +3461,7 @@
       </p:sp>
       <p:sp>
         <p:nvSpPr>
-          <p:cNvPr id="23" name="Shape 21"/>
+          <p:cNvPr id="25" name="Shape 22"/>
           <p:cNvSpPr/>
           <p:nvPr/>
         </p:nvSpPr>
@@ -3250,7 +3481,7 @@
       </p:sp>
       <p:sp>
         <p:nvSpPr>
-          <p:cNvPr id="24" name="Text 22"/>
+          <p:cNvPr id="26" name="Text 23"/>
           <p:cNvSpPr txBox="1"/>
           <p:nvPr/>
         </p:nvSpPr>
@@ -3289,7 +3520,7 @@
       </p:sp>
       <p:sp>
         <p:nvSpPr>
-          <p:cNvPr id="25" name="Text 23"/>
+          <p:cNvPr id="27" name="Text 24"/>
           <p:cNvSpPr txBox="1"/>
           <p:nvPr/>
         </p:nvSpPr>
@@ -3351,7 +3582,7 @@
       </p:sp>
       <p:sp>
         <p:nvSpPr>
-          <p:cNvPr id="26" name="Shape 24"/>
+          <p:cNvPr id="28" name="Shape 25"/>
           <p:cNvSpPr/>
           <p:nvPr/>
         </p:nvSpPr>
@@ -3378,7 +3609,7 @@
       </p:sp>
       <p:sp>
         <p:nvSpPr>
-          <p:cNvPr id="27" name="Shape 25"/>
+          <p:cNvPr id="29" name="Shape 26"/>
           <p:cNvSpPr/>
           <p:nvPr/>
         </p:nvSpPr>
@@ -3398,7 +3629,7 @@
       </p:sp>
       <p:sp>
         <p:nvSpPr>
-          <p:cNvPr id="28" name="Text 26"/>
+          <p:cNvPr id="30" name="Text 27"/>
           <p:cNvSpPr txBox="1"/>
           <p:nvPr/>
         </p:nvSpPr>
@@ -3437,7 +3668,7 @@
       </p:sp>
       <p:sp>
         <p:nvSpPr>
-          <p:cNvPr id="29" name="Text 27"/>
+          <p:cNvPr id="31" name="Text 28"/>
           <p:cNvSpPr txBox="1"/>
           <p:nvPr/>
         </p:nvSpPr>
@@ -3499,7 +3730,7 @@
       </p:sp>
       <p:sp>
         <p:nvSpPr>
-          <p:cNvPr id="30" name="Shape 28"/>
+          <p:cNvPr id="32" name="Shape 29"/>
           <p:cNvSpPr/>
           <p:nvPr/>
         </p:nvSpPr>
@@ -3526,7 +3757,7 @@
       </p:sp>
       <p:sp>
         <p:nvSpPr>
-          <p:cNvPr id="31" name="Shape 29"/>
+          <p:cNvPr id="33" name="Shape 30"/>
           <p:cNvSpPr/>
           <p:nvPr/>
         </p:nvSpPr>
@@ -3546,7 +3777,7 @@
       </p:sp>
       <p:sp>
         <p:nvSpPr>
-          <p:cNvPr id="32" name="Text 30"/>
+          <p:cNvPr id="34" name="Text 31"/>
           <p:cNvSpPr txBox="1"/>
           <p:nvPr/>
         </p:nvSpPr>
@@ -3585,7 +3816,7 @@
       </p:sp>
       <p:sp>
         <p:nvSpPr>
-          <p:cNvPr id="33" name="Text 31"/>
+          <p:cNvPr id="35" name="Text 32"/>
           <p:cNvSpPr txBox="1"/>
           <p:nvPr/>
         </p:nvSpPr>
@@ -3677,9 +3908,72 @@
           <a:chExt cx="0" cy="0"/>
         </a:xfrm>
       </p:grpSpPr>
-      <p:sp>
-        <p:nvSpPr>
-          <p:cNvPr id="2" name="Shape 0"/>
+      <p:pic>
+        <p:nvPicPr>
+          <p:cNvPr id="2" name="Image 0" descr="/sessions/compassionate-sweet-heisenberg/mnt/dev-aspath-life-main/tools/assets/logo-deck.png">    </p:cNvPr>
+          <p:cNvPicPr>
+            <a:picLocks noChangeAspect="1"/>
+          </p:cNvPicPr>
+          <p:nvPr/>
+        </p:nvPicPr>
+        <p:blipFill>
+          <a:blip r:embed="rId1"/>
+          <a:stretch>
+            <a:fillRect/>
+          </a:stretch>
+        </p:blipFill>
+        <p:spPr>
+          <a:xfrm>
+            <a:off x="11458173" y="109728"/>
+            <a:ext cx="209571" cy="256032"/>
+          </a:xfrm>
+          <a:prstGeom prst="rect">
+            <a:avLst/>
+          </a:prstGeom>
+        </p:spPr>
+      </p:pic>
+      <p:sp>
+        <p:nvSpPr>
+          <p:cNvPr id="3" name="Text 0"/>
+          <p:cNvSpPr txBox="1"/>
+          <p:nvPr/>
+        </p:nvSpPr>
+        <p:spPr>
+          <a:xfrm>
+            <a:off x="8623533" y="128016"/>
+            <a:ext cx="2743200" cy="237744"/>
+          </a:xfrm>
+          <a:prstGeom prst="rect">
+            <a:avLst/>
+          </a:prstGeom>
+          <a:noFill/>
+          <a:ln/>
+        </p:spPr>
+        <p:txBody>
+          <a:bodyPr wrap="square" lIns="0" tIns="0" rIns="0" bIns="0" rtlCol="0" anchor="ctr"/>
+          <a:lstStyle/>
+          <a:p>
+            <a:pPr algn="r" indent="0" marL="0">
+              <a:buNone/>
+            </a:pPr>
+            <a:r>
+              <a:rPr lang="en-US" sz="750" dirty="0">
+                <a:solidFill>
+                  <a:srgbClr val="97A9AF"/>
+                </a:solidFill>
+                <a:latin typeface="Meiryo" pitchFamily="34" charset="0"/>
+                <a:ea typeface="Meiryo" pitchFamily="34" charset="-122"/>
+                <a:cs typeface="Meiryo" pitchFamily="34" charset="-120"/>
+              </a:rPr>
+              <a:t>鹿児島のパーキンソン病専門トレーニングスタジオ</a:t>
+            </a:r>
+            <a:endParaRPr lang="en-US" sz="750" dirty="0"/>
+          </a:p>
+        </p:txBody>
+      </p:sp>
+      <p:sp>
+        <p:nvSpPr>
+          <p:cNvPr id="4" name="Shape 1"/>
           <p:cNvSpPr/>
           <p:nvPr/>
         </p:nvSpPr>
@@ -3701,7 +3995,7 @@
       </p:sp>
       <p:sp>
         <p:nvSpPr>
-          <p:cNvPr id="3" name="Text 1"/>
+          <p:cNvPr id="5" name="Text 2"/>
           <p:cNvSpPr txBox="1"/>
           <p:nvPr/>
         </p:nvSpPr>
@@ -3740,7 +4034,7 @@
       </p:sp>
       <p:sp>
         <p:nvSpPr>
-          <p:cNvPr id="4" name="Text 2"/>
+          <p:cNvPr id="6" name="Text 3"/>
           <p:cNvSpPr txBox="1"/>
           <p:nvPr/>
         </p:nvSpPr>
@@ -3779,7 +4073,7 @@
       </p:sp>
       <p:sp>
         <p:nvSpPr>
-          <p:cNvPr id="5" name="Text 3"/>
+          <p:cNvPr id="7" name="Text 4"/>
           <p:cNvSpPr txBox="1"/>
           <p:nvPr/>
         </p:nvSpPr>
@@ -3818,7 +4112,7 @@
       </p:sp>
       <p:sp>
         <p:nvSpPr>
-          <p:cNvPr id="6" name="Text 4"/>
+          <p:cNvPr id="8" name="Text 5"/>
           <p:cNvSpPr txBox="1"/>
           <p:nvPr/>
         </p:nvSpPr>
@@ -3857,7 +4151,7 @@
       </p:sp>
       <p:sp>
         <p:nvSpPr>
-          <p:cNvPr id="7" name="Shape 5"/>
+          <p:cNvPr id="9" name="Shape 6"/>
           <p:cNvSpPr/>
           <p:nvPr/>
         </p:nvSpPr>
@@ -3877,7 +4171,7 @@
       </p:sp>
       <p:sp>
         <p:nvSpPr>
-          <p:cNvPr id="8" name="Text 6"/>
+          <p:cNvPr id="10" name="Text 7"/>
           <p:cNvSpPr txBox="1"/>
           <p:nvPr/>
         </p:nvSpPr>
@@ -3916,7 +4210,7 @@
       </p:sp>
       <p:sp>
         <p:nvSpPr>
-          <p:cNvPr id="9" name="Text 7"/>
+          <p:cNvPr id="11" name="Text 8"/>
           <p:cNvSpPr txBox="1"/>
           <p:nvPr/>
         </p:nvSpPr>
@@ -3961,7 +4255,7 @@
       </p:sp>
       <p:sp>
         <p:nvSpPr>
-          <p:cNvPr id="10" name="Shape 8"/>
+          <p:cNvPr id="12" name="Shape 9"/>
           <p:cNvSpPr/>
           <p:nvPr/>
         </p:nvSpPr>
@@ -3981,7 +4275,7 @@
       </p:sp>
       <p:sp>
         <p:nvSpPr>
-          <p:cNvPr id="11" name="Text 9"/>
+          <p:cNvPr id="13" name="Text 10"/>
           <p:cNvSpPr txBox="1"/>
           <p:nvPr/>
         </p:nvSpPr>
@@ -4020,7 +4314,7 @@
       </p:sp>
       <p:sp>
         <p:nvSpPr>
-          <p:cNvPr id="12" name="Text 10"/>
+          <p:cNvPr id="14" name="Text 11"/>
           <p:cNvSpPr txBox="1"/>
           <p:nvPr/>
         </p:nvSpPr>
@@ -4076,7 +4370,7 @@
       </p:sp>
       <p:sp>
         <p:nvSpPr>
-          <p:cNvPr id="13" name="Shape 11"/>
+          <p:cNvPr id="15" name="Shape 12"/>
           <p:cNvSpPr/>
           <p:nvPr/>
         </p:nvSpPr>
@@ -4096,7 +4390,7 @@
       </p:sp>
       <p:sp>
         <p:nvSpPr>
-          <p:cNvPr id="14" name="Text 12"/>
+          <p:cNvPr id="16" name="Text 13"/>
           <p:cNvSpPr txBox="1"/>
           <p:nvPr/>
         </p:nvSpPr>
@@ -4135,7 +4429,7 @@
       </p:sp>
       <p:sp>
         <p:nvSpPr>
-          <p:cNvPr id="15" name="Text 13"/>
+          <p:cNvPr id="17" name="Text 14"/>
           <p:cNvSpPr txBox="1"/>
           <p:nvPr/>
         </p:nvSpPr>
@@ -4191,7 +4485,7 @@
       </p:sp>
       <p:sp>
         <p:nvSpPr>
-          <p:cNvPr id="16" name="Shape 14"/>
+          <p:cNvPr id="18" name="Shape 15"/>
           <p:cNvSpPr/>
           <p:nvPr/>
         </p:nvSpPr>
@@ -4211,7 +4505,7 @@
       </p:sp>
       <p:sp>
         <p:nvSpPr>
-          <p:cNvPr id="17" name="Text 15"/>
+          <p:cNvPr id="19" name="Text 16"/>
           <p:cNvSpPr txBox="1"/>
           <p:nvPr/>
         </p:nvSpPr>
@@ -4250,7 +4544,7 @@
       </p:sp>
       <p:sp>
         <p:nvSpPr>
-          <p:cNvPr id="18" name="Text 16"/>
+          <p:cNvPr id="20" name="Text 17"/>
           <p:cNvSpPr txBox="1"/>
           <p:nvPr/>
         </p:nvSpPr>
@@ -4306,7 +4600,7 @@
       </p:sp>
       <p:sp>
         <p:nvSpPr>
-          <p:cNvPr id="19" name="Shape 17"/>
+          <p:cNvPr id="21" name="Shape 18"/>
           <p:cNvSpPr/>
           <p:nvPr/>
         </p:nvSpPr>
@@ -4333,7 +4627,7 @@
       </p:sp>
       <p:sp>
         <p:nvSpPr>
-          <p:cNvPr id="20" name="Text 18"/>
+          <p:cNvPr id="22" name="Text 19"/>
           <p:cNvSpPr txBox="1"/>
           <p:nvPr/>
         </p:nvSpPr>
@@ -4372,7 +4666,7 @@
       </p:sp>
       <p:sp>
         <p:nvSpPr>
-          <p:cNvPr id="21" name="Text 19"/>
+          <p:cNvPr id="23" name="Text 20"/>
           <p:cNvSpPr txBox="1"/>
           <p:nvPr/>
         </p:nvSpPr>
@@ -4436,7 +4730,7 @@
       </p:sp>
       <p:sp>
         <p:nvSpPr>
-          <p:cNvPr id="22" name="Shape 20"/>
+          <p:cNvPr id="24" name="Shape 21"/>
           <p:cNvSpPr/>
           <p:nvPr/>
         </p:nvSpPr>
@@ -4463,7 +4757,7 @@
       </p:sp>
       <p:sp>
         <p:nvSpPr>
-          <p:cNvPr id="23" name="Shape 21"/>
+          <p:cNvPr id="25" name="Shape 22"/>
           <p:cNvSpPr/>
           <p:nvPr/>
         </p:nvSpPr>
@@ -4483,7 +4777,7 @@
       </p:sp>
       <p:sp>
         <p:nvSpPr>
-          <p:cNvPr id="24" name="Text 22"/>
+          <p:cNvPr id="26" name="Text 23"/>
           <p:cNvSpPr txBox="1"/>
           <p:nvPr/>
         </p:nvSpPr>
@@ -4522,7 +4816,7 @@
       </p:sp>
       <p:sp>
         <p:nvSpPr>
-          <p:cNvPr id="25" name="Text 23"/>
+          <p:cNvPr id="27" name="Text 24"/>
           <p:cNvSpPr txBox="1"/>
           <p:nvPr/>
         </p:nvSpPr>
@@ -4584,7 +4878,7 @@
       </p:sp>
       <p:sp>
         <p:nvSpPr>
-          <p:cNvPr id="26" name="Shape 24"/>
+          <p:cNvPr id="28" name="Shape 25"/>
           <p:cNvSpPr/>
           <p:nvPr/>
         </p:nvSpPr>
@@ -4611,7 +4905,7 @@
       </p:sp>
       <p:sp>
         <p:nvSpPr>
-          <p:cNvPr id="27" name="Shape 25"/>
+          <p:cNvPr id="29" name="Shape 26"/>
           <p:cNvSpPr/>
           <p:nvPr/>
         </p:nvSpPr>
@@ -4631,7 +4925,7 @@
       </p:sp>
       <p:sp>
         <p:nvSpPr>
-          <p:cNvPr id="28" name="Text 26"/>
+          <p:cNvPr id="30" name="Text 27"/>
           <p:cNvSpPr txBox="1"/>
           <p:nvPr/>
         </p:nvSpPr>
@@ -4670,7 +4964,7 @@
       </p:sp>
       <p:sp>
         <p:nvSpPr>
-          <p:cNvPr id="29" name="Text 27"/>
+          <p:cNvPr id="31" name="Text 28"/>
           <p:cNvSpPr txBox="1"/>
           <p:nvPr/>
         </p:nvSpPr>
@@ -4762,9 +5056,72 @@
           <a:chExt cx="0" cy="0"/>
         </a:xfrm>
       </p:grpSpPr>
-      <p:sp>
-        <p:nvSpPr>
-          <p:cNvPr id="2" name="Shape 0"/>
+      <p:pic>
+        <p:nvPicPr>
+          <p:cNvPr id="2" name="Image 0" descr="/sessions/compassionate-sweet-heisenberg/mnt/dev-aspath-life-main/tools/assets/logo-deck.png">    </p:cNvPr>
+          <p:cNvPicPr>
+            <a:picLocks noChangeAspect="1"/>
+          </p:cNvPicPr>
+          <p:nvPr/>
+        </p:nvPicPr>
+        <p:blipFill>
+          <a:blip r:embed="rId1"/>
+          <a:stretch>
+            <a:fillRect/>
+          </a:stretch>
+        </p:blipFill>
+        <p:spPr>
+          <a:xfrm>
+            <a:off x="11458173" y="109728"/>
+            <a:ext cx="209571" cy="256032"/>
+          </a:xfrm>
+          <a:prstGeom prst="rect">
+            <a:avLst/>
+          </a:prstGeom>
+        </p:spPr>
+      </p:pic>
+      <p:sp>
+        <p:nvSpPr>
+          <p:cNvPr id="3" name="Text 0"/>
+          <p:cNvSpPr txBox="1"/>
+          <p:nvPr/>
+        </p:nvSpPr>
+        <p:spPr>
+          <a:xfrm>
+            <a:off x="8623533" y="128016"/>
+            <a:ext cx="2743200" cy="237744"/>
+          </a:xfrm>
+          <a:prstGeom prst="rect">
+            <a:avLst/>
+          </a:prstGeom>
+          <a:noFill/>
+          <a:ln/>
+        </p:spPr>
+        <p:txBody>
+          <a:bodyPr wrap="square" lIns="0" tIns="0" rIns="0" bIns="0" rtlCol="0" anchor="ctr"/>
+          <a:lstStyle/>
+          <a:p>
+            <a:pPr algn="r" indent="0" marL="0">
+              <a:buNone/>
+            </a:pPr>
+            <a:r>
+              <a:rPr lang="en-US" sz="750" dirty="0">
+                <a:solidFill>
+                  <a:srgbClr val="97A9AF"/>
+                </a:solidFill>
+                <a:latin typeface="Meiryo" pitchFamily="34" charset="0"/>
+                <a:ea typeface="Meiryo" pitchFamily="34" charset="-122"/>
+                <a:cs typeface="Meiryo" pitchFamily="34" charset="-120"/>
+              </a:rPr>
+              <a:t>鹿児島のパーキンソン病専門トレーニングスタジオ</a:t>
+            </a:r>
+            <a:endParaRPr lang="en-US" sz="750" dirty="0"/>
+          </a:p>
+        </p:txBody>
+      </p:sp>
+      <p:sp>
+        <p:nvSpPr>
+          <p:cNvPr id="4" name="Shape 1"/>
           <p:cNvSpPr/>
           <p:nvPr/>
         </p:nvSpPr>
@@ -4786,7 +5143,7 @@
       </p:sp>
       <p:sp>
         <p:nvSpPr>
-          <p:cNvPr id="3" name="Text 1"/>
+          <p:cNvPr id="5" name="Text 2"/>
           <p:cNvSpPr txBox="1"/>
           <p:nvPr/>
         </p:nvSpPr>
@@ -4825,7 +5182,7 @@
       </p:sp>
       <p:sp>
         <p:nvSpPr>
-          <p:cNvPr id="4" name="Text 2"/>
+          <p:cNvPr id="6" name="Text 3"/>
           <p:cNvSpPr txBox="1"/>
           <p:nvPr/>
         </p:nvSpPr>
@@ -4864,7 +5221,7 @@
       </p:sp>
       <p:sp>
         <p:nvSpPr>
-          <p:cNvPr id="5" name="Text 3"/>
+          <p:cNvPr id="7" name="Text 4"/>
           <p:cNvSpPr txBox="1"/>
           <p:nvPr/>
         </p:nvSpPr>
@@ -4903,7 +5260,7 @@
       </p:sp>
       <p:sp>
         <p:nvSpPr>
-          <p:cNvPr id="6" name="Text 4"/>
+          <p:cNvPr id="8" name="Text 5"/>
           <p:cNvSpPr txBox="1"/>
           <p:nvPr/>
         </p:nvSpPr>
@@ -4942,7 +5299,7 @@
       </p:sp>
       <p:sp>
         <p:nvSpPr>
-          <p:cNvPr id="7" name="Shape 5"/>
+          <p:cNvPr id="9" name="Shape 6"/>
           <p:cNvSpPr/>
           <p:nvPr/>
         </p:nvSpPr>
@@ -4969,7 +5326,7 @@
       </p:sp>
       <p:sp>
         <p:nvSpPr>
-          <p:cNvPr id="8" name="Text 6"/>
+          <p:cNvPr id="10" name="Text 7"/>
           <p:cNvSpPr txBox="1"/>
           <p:nvPr/>
         </p:nvSpPr>
@@ -5008,7 +5365,7 @@
       </p:sp>
       <p:sp>
         <p:nvSpPr>
-          <p:cNvPr id="9" name="Text 7"/>
+          <p:cNvPr id="11" name="Text 8"/>
           <p:cNvSpPr txBox="1"/>
           <p:nvPr/>
         </p:nvSpPr>
@@ -5047,7 +5404,7 @@
       </p:sp>
       <p:sp>
         <p:nvSpPr>
-          <p:cNvPr id="10" name="Shape 8"/>
+          <p:cNvPr id="12" name="Shape 9"/>
           <p:cNvSpPr/>
           <p:nvPr/>
         </p:nvSpPr>
@@ -5069,7 +5426,7 @@
       </p:sp>
       <p:sp>
         <p:nvSpPr>
-          <p:cNvPr id="11" name="Text 9"/>
+          <p:cNvPr id="13" name="Text 10"/>
           <p:cNvSpPr txBox="1"/>
           <p:nvPr/>
         </p:nvSpPr>
@@ -5131,7 +5488,7 @@
       </p:sp>
       <p:sp>
         <p:nvSpPr>
-          <p:cNvPr id="12" name="Text 10"/>
+          <p:cNvPr id="14" name="Text 11"/>
           <p:cNvSpPr txBox="1"/>
           <p:nvPr/>
         </p:nvSpPr>
@@ -5173,7 +5530,7 @@
       </p:sp>
       <p:sp>
         <p:nvSpPr>
-          <p:cNvPr id="13" name="Shape 11"/>
+          <p:cNvPr id="15" name="Shape 12"/>
           <p:cNvSpPr/>
           <p:nvPr/>
         </p:nvSpPr>
@@ -5200,7 +5557,7 @@
       </p:sp>
       <p:sp>
         <p:nvSpPr>
-          <p:cNvPr id="14" name="Text 12"/>
+          <p:cNvPr id="16" name="Text 13"/>
           <p:cNvSpPr txBox="1"/>
           <p:nvPr/>
         </p:nvSpPr>
@@ -5239,7 +5596,7 @@
       </p:sp>
       <p:sp>
         <p:nvSpPr>
-          <p:cNvPr id="15" name="Text 13"/>
+          <p:cNvPr id="17" name="Text 14"/>
           <p:cNvSpPr txBox="1"/>
           <p:nvPr/>
         </p:nvSpPr>
@@ -5278,7 +5635,7 @@
       </p:sp>
       <p:sp>
         <p:nvSpPr>
-          <p:cNvPr id="16" name="Shape 14"/>
+          <p:cNvPr id="18" name="Shape 15"/>
           <p:cNvSpPr/>
           <p:nvPr/>
         </p:nvSpPr>
@@ -5300,7 +5657,7 @@
       </p:sp>
       <p:sp>
         <p:nvSpPr>
-          <p:cNvPr id="17" name="Text 15"/>
+          <p:cNvPr id="19" name="Text 16"/>
           <p:cNvSpPr txBox="1"/>
           <p:nvPr/>
         </p:nvSpPr>
@@ -5362,7 +5719,7 @@
       </p:sp>
       <p:sp>
         <p:nvSpPr>
-          <p:cNvPr id="18" name="Text 16"/>
+          <p:cNvPr id="20" name="Text 17"/>
           <p:cNvSpPr txBox="1"/>
           <p:nvPr/>
         </p:nvSpPr>
@@ -5404,7 +5761,7 @@
       </p:sp>
       <p:sp>
         <p:nvSpPr>
-          <p:cNvPr id="19" name="Shape 17"/>
+          <p:cNvPr id="21" name="Shape 18"/>
           <p:cNvSpPr/>
           <p:nvPr/>
         </p:nvSpPr>
@@ -5431,7 +5788,7 @@
       </p:sp>
       <p:sp>
         <p:nvSpPr>
-          <p:cNvPr id="20" name="Text 18"/>
+          <p:cNvPr id="22" name="Text 19"/>
           <p:cNvSpPr txBox="1"/>
           <p:nvPr/>
         </p:nvSpPr>
@@ -5470,7 +5827,7 @@
       </p:sp>
       <p:sp>
         <p:nvSpPr>
-          <p:cNvPr id="21" name="Text 19"/>
+          <p:cNvPr id="23" name="Text 20"/>
           <p:cNvSpPr txBox="1"/>
           <p:nvPr/>
         </p:nvSpPr>
@@ -5509,7 +5866,7 @@
       </p:sp>
       <p:sp>
         <p:nvSpPr>
-          <p:cNvPr id="22" name="Shape 20"/>
+          <p:cNvPr id="24" name="Shape 21"/>
           <p:cNvSpPr/>
           <p:nvPr/>
         </p:nvSpPr>
@@ -5531,7 +5888,7 @@
       </p:sp>
       <p:sp>
         <p:nvSpPr>
-          <p:cNvPr id="23" name="Text 21"/>
+          <p:cNvPr id="25" name="Text 22"/>
           <p:cNvSpPr txBox="1"/>
           <p:nvPr/>
         </p:nvSpPr>
@@ -5593,7 +5950,7 @@
       </p:sp>
       <p:sp>
         <p:nvSpPr>
-          <p:cNvPr id="24" name="Text 22"/>
+          <p:cNvPr id="26" name="Text 23"/>
           <p:cNvSpPr txBox="1"/>
           <p:nvPr/>
         </p:nvSpPr>
@@ -5635,7 +5992,7 @@
       </p:sp>
       <p:sp>
         <p:nvSpPr>
-          <p:cNvPr id="25" name="Shape 23"/>
+          <p:cNvPr id="27" name="Shape 24"/>
           <p:cNvSpPr/>
           <p:nvPr/>
         </p:nvSpPr>
@@ -5662,7 +6019,7 @@
       </p:sp>
       <p:sp>
         <p:nvSpPr>
-          <p:cNvPr id="26" name="Shape 24"/>
+          <p:cNvPr id="28" name="Shape 25"/>
           <p:cNvSpPr/>
           <p:nvPr/>
         </p:nvSpPr>
@@ -5682,7 +6039,7 @@
       </p:sp>
       <p:sp>
         <p:nvSpPr>
-          <p:cNvPr id="27" name="Text 25"/>
+          <p:cNvPr id="29" name="Text 26"/>
           <p:cNvSpPr txBox="1"/>
           <p:nvPr/>
         </p:nvSpPr>
@@ -5721,7 +6078,7 @@
       </p:sp>
       <p:sp>
         <p:nvSpPr>
-          <p:cNvPr id="28" name="Text 26"/>
+          <p:cNvPr id="30" name="Text 27"/>
           <p:cNvSpPr txBox="1"/>
           <p:nvPr/>
         </p:nvSpPr>
@@ -5813,187 +6170,9 @@
           <a:chExt cx="0" cy="0"/>
         </a:xfrm>
       </p:grpSpPr>
-      <p:sp>
-        <p:nvSpPr>
-          <p:cNvPr id="2" name="Shape 0"/>
-          <p:cNvSpPr/>
-          <p:nvPr/>
-        </p:nvSpPr>
-        <p:spPr>
-          <a:xfrm>
-            <a:off x="548640" y="329184"/>
-            <a:ext cx="475488" cy="475488"/>
-          </a:xfrm>
-          <a:prstGeom prst="roundRect">
-            <a:avLst>
-              <a:gd name="adj" fmla="val 50000"/>
-            </a:avLst>
-          </a:prstGeom>
-          <a:solidFill>
-            <a:srgbClr val="F4A261"/>
-          </a:solidFill>
-          <a:ln/>
-        </p:spPr>
-      </p:sp>
-      <p:sp>
-        <p:nvSpPr>
-          <p:cNvPr id="3" name="Text 1"/>
-          <p:cNvSpPr txBox="1"/>
-          <p:nvPr/>
-        </p:nvSpPr>
-        <p:spPr>
-          <a:xfrm>
-            <a:off x="548640" y="329184"/>
-            <a:ext cx="475488" cy="475488"/>
-          </a:xfrm>
-          <a:prstGeom prst="rect">
-            <a:avLst/>
-          </a:prstGeom>
-          <a:noFill/>
-          <a:ln/>
-        </p:spPr>
-        <p:txBody>
-          <a:bodyPr wrap="square" lIns="0" tIns="0" rIns="0" bIns="0" rtlCol="0" anchor="ctr"/>
-          <a:lstStyle/>
-          <a:p>
-            <a:pPr algn="ctr" indent="0" marL="0">
-              <a:buNone/>
-            </a:pPr>
-            <a:r>
-              <a:rPr lang="en-US" sz="2000" b="1" dirty="0">
-                <a:solidFill>
-                  <a:srgbClr val="FFFFFF"/>
-                </a:solidFill>
-                <a:latin typeface="Meiryo" pitchFamily="34" charset="0"/>
-                <a:ea typeface="Meiryo" pitchFamily="34" charset="-122"/>
-                <a:cs typeface="Meiryo" pitchFamily="34" charset="-120"/>
-              </a:rPr>
-              <a:t>B</a:t>
-            </a:r>
-            <a:endParaRPr lang="en-US" sz="2000" dirty="0"/>
-          </a:p>
-        </p:txBody>
-      </p:sp>
-      <p:sp>
-        <p:nvSpPr>
-          <p:cNvPr id="4" name="Text 2"/>
-          <p:cNvSpPr txBox="1"/>
-          <p:nvPr/>
-        </p:nvSpPr>
-        <p:spPr>
-          <a:xfrm>
-            <a:off x="1207008" y="292608"/>
-            <a:ext cx="10332720" cy="603504"/>
-          </a:xfrm>
-          <a:prstGeom prst="rect">
-            <a:avLst/>
-          </a:prstGeom>
-          <a:noFill/>
-          <a:ln/>
-        </p:spPr>
-        <p:txBody>
-          <a:bodyPr wrap="square" lIns="0" tIns="0" rIns="0" bIns="0" rtlCol="0" anchor="ctr"/>
-          <a:lstStyle/>
-          <a:p>
-            <a:pPr indent="0" marL="0">
-              <a:buNone/>
-            </a:pPr>
-            <a:r>
-              <a:rPr lang="en-US" sz="2800" b="1" dirty="0">
-                <a:solidFill>
-                  <a:srgbClr val="264653"/>
-                </a:solidFill>
-                <a:latin typeface="Meiryo" pitchFamily="34" charset="0"/>
-                <a:ea typeface="Meiryo" pitchFamily="34" charset="-122"/>
-                <a:cs typeface="Meiryo" pitchFamily="34" charset="-120"/>
-              </a:rPr>
-              <a:t>コメントスパムへの備え</a:t>
-            </a:r>
-            <a:endParaRPr lang="en-US" sz="2800" dirty="0"/>
-          </a:p>
-        </p:txBody>
-      </p:sp>
-      <p:sp>
-        <p:nvSpPr>
-          <p:cNvPr id="5" name="Text 3"/>
-          <p:cNvSpPr txBox="1"/>
-          <p:nvPr/>
-        </p:nvSpPr>
-        <p:spPr>
-          <a:xfrm>
-            <a:off x="1225296" y="914400"/>
-            <a:ext cx="10332720" cy="329184"/>
-          </a:xfrm>
-          <a:prstGeom prst="rect">
-            <a:avLst/>
-          </a:prstGeom>
-          <a:noFill/>
-          <a:ln/>
-        </p:spPr>
-        <p:txBody>
-          <a:bodyPr wrap="square" lIns="0" tIns="0" rIns="0" bIns="0" rtlCol="0" anchor="ctr"/>
-          <a:lstStyle/>
-          <a:p>
-            <a:pPr indent="0" marL="0">
-              <a:buNone/>
-            </a:pPr>
-            <a:r>
-              <a:rPr lang="en-US" sz="1400" dirty="0">
-                <a:solidFill>
-                  <a:srgbClr val="52707A"/>
-                </a:solidFill>
-                <a:latin typeface="Meiryo" pitchFamily="34" charset="0"/>
-                <a:ea typeface="Meiryo" pitchFamily="34" charset="-122"/>
-                <a:cs typeface="Meiryo" pitchFamily="34" charset="-120"/>
-              </a:rPr>
-              <a:t>放置しても表示されませんが、溜まると見落としの原因になります</a:t>
-            </a:r>
-            <a:endParaRPr lang="en-US" sz="1400" dirty="0"/>
-          </a:p>
-        </p:txBody>
-      </p:sp>
-      <p:sp>
-        <p:nvSpPr>
-          <p:cNvPr id="6" name="Text 4"/>
-          <p:cNvSpPr txBox="1"/>
-          <p:nvPr/>
-        </p:nvSpPr>
-        <p:spPr>
-          <a:xfrm>
-            <a:off x="11384280" y="6355080"/>
-            <a:ext cx="411480" cy="256032"/>
-          </a:xfrm>
-          <a:prstGeom prst="rect">
-            <a:avLst/>
-          </a:prstGeom>
-          <a:noFill/>
-          <a:ln/>
-        </p:spPr>
-        <p:txBody>
-          <a:bodyPr wrap="square" lIns="0" tIns="0" rIns="0" bIns="0" rtlCol="0" anchor="ctr"/>
-          <a:lstStyle/>
-          <a:p>
-            <a:pPr algn="r" indent="0" marL="0">
-              <a:buNone/>
-            </a:pPr>
-            <a:r>
-              <a:rPr lang="en-US" sz="1050" dirty="0">
-                <a:solidFill>
-                  <a:srgbClr val="A8B4B8"/>
-                </a:solidFill>
-                <a:latin typeface="Meiryo" pitchFamily="34" charset="0"/>
-                <a:ea typeface="Meiryo" pitchFamily="34" charset="-122"/>
-                <a:cs typeface="Meiryo" pitchFamily="34" charset="-120"/>
-              </a:rPr>
-              <a:t>12</a:t>
-            </a:r>
-            <a:endParaRPr lang="en-US" sz="1050" dirty="0"/>
-          </a:p>
-        </p:txBody>
-      </p:sp>
       <p:pic>
         <p:nvPicPr>
-          <p:cNvPr id="7" name="Image 0" descr="/sessions/compassionate-sweet-heisenberg/mnt/dev-aspath-life-main/_wp移行素材/★引継ぎ資料/画像/03_コメント.jpg">    </p:cNvPr>
+          <p:cNvPr id="2" name="Image 0" descr="/sessions/compassionate-sweet-heisenberg/mnt/dev-aspath-life-main/tools/assets/logo-deck.png">    </p:cNvPr>
           <p:cNvPicPr>
             <a:picLocks noChangeAspect="1"/>
           </p:cNvPicPr>
@@ -6007,6 +6186,247 @@
         </p:blipFill>
         <p:spPr>
           <a:xfrm>
+            <a:off x="11458173" y="109728"/>
+            <a:ext cx="209571" cy="256032"/>
+          </a:xfrm>
+          <a:prstGeom prst="rect">
+            <a:avLst/>
+          </a:prstGeom>
+        </p:spPr>
+      </p:pic>
+      <p:sp>
+        <p:nvSpPr>
+          <p:cNvPr id="3" name="Text 0"/>
+          <p:cNvSpPr txBox="1"/>
+          <p:nvPr/>
+        </p:nvSpPr>
+        <p:spPr>
+          <a:xfrm>
+            <a:off x="8623533" y="128016"/>
+            <a:ext cx="2743200" cy="237744"/>
+          </a:xfrm>
+          <a:prstGeom prst="rect">
+            <a:avLst/>
+          </a:prstGeom>
+          <a:noFill/>
+          <a:ln/>
+        </p:spPr>
+        <p:txBody>
+          <a:bodyPr wrap="square" lIns="0" tIns="0" rIns="0" bIns="0" rtlCol="0" anchor="ctr"/>
+          <a:lstStyle/>
+          <a:p>
+            <a:pPr algn="r" indent="0" marL="0">
+              <a:buNone/>
+            </a:pPr>
+            <a:r>
+              <a:rPr lang="en-US" sz="750" dirty="0">
+                <a:solidFill>
+                  <a:srgbClr val="97A9AF"/>
+                </a:solidFill>
+                <a:latin typeface="Meiryo" pitchFamily="34" charset="0"/>
+                <a:ea typeface="Meiryo" pitchFamily="34" charset="-122"/>
+                <a:cs typeface="Meiryo" pitchFamily="34" charset="-120"/>
+              </a:rPr>
+              <a:t>鹿児島のパーキンソン病専門トレーニングスタジオ</a:t>
+            </a:r>
+            <a:endParaRPr lang="en-US" sz="750" dirty="0"/>
+          </a:p>
+        </p:txBody>
+      </p:sp>
+      <p:sp>
+        <p:nvSpPr>
+          <p:cNvPr id="4" name="Shape 1"/>
+          <p:cNvSpPr/>
+          <p:nvPr/>
+        </p:nvSpPr>
+        <p:spPr>
+          <a:xfrm>
+            <a:off x="548640" y="329184"/>
+            <a:ext cx="475488" cy="475488"/>
+          </a:xfrm>
+          <a:prstGeom prst="roundRect">
+            <a:avLst>
+              <a:gd name="adj" fmla="val 50000"/>
+            </a:avLst>
+          </a:prstGeom>
+          <a:solidFill>
+            <a:srgbClr val="F4A261"/>
+          </a:solidFill>
+          <a:ln/>
+        </p:spPr>
+      </p:sp>
+      <p:sp>
+        <p:nvSpPr>
+          <p:cNvPr id="5" name="Text 2"/>
+          <p:cNvSpPr txBox="1"/>
+          <p:nvPr/>
+        </p:nvSpPr>
+        <p:spPr>
+          <a:xfrm>
+            <a:off x="548640" y="329184"/>
+            <a:ext cx="475488" cy="475488"/>
+          </a:xfrm>
+          <a:prstGeom prst="rect">
+            <a:avLst/>
+          </a:prstGeom>
+          <a:noFill/>
+          <a:ln/>
+        </p:spPr>
+        <p:txBody>
+          <a:bodyPr wrap="square" lIns="0" tIns="0" rIns="0" bIns="0" rtlCol="0" anchor="ctr"/>
+          <a:lstStyle/>
+          <a:p>
+            <a:pPr algn="ctr" indent="0" marL="0">
+              <a:buNone/>
+            </a:pPr>
+            <a:r>
+              <a:rPr lang="en-US" sz="2000" b="1" dirty="0">
+                <a:solidFill>
+                  <a:srgbClr val="FFFFFF"/>
+                </a:solidFill>
+                <a:latin typeface="Meiryo" pitchFamily="34" charset="0"/>
+                <a:ea typeface="Meiryo" pitchFamily="34" charset="-122"/>
+                <a:cs typeface="Meiryo" pitchFamily="34" charset="-120"/>
+              </a:rPr>
+              <a:t>B</a:t>
+            </a:r>
+            <a:endParaRPr lang="en-US" sz="2000" dirty="0"/>
+          </a:p>
+        </p:txBody>
+      </p:sp>
+      <p:sp>
+        <p:nvSpPr>
+          <p:cNvPr id="6" name="Text 3"/>
+          <p:cNvSpPr txBox="1"/>
+          <p:nvPr/>
+        </p:nvSpPr>
+        <p:spPr>
+          <a:xfrm>
+            <a:off x="1207008" y="292608"/>
+            <a:ext cx="10332720" cy="603504"/>
+          </a:xfrm>
+          <a:prstGeom prst="rect">
+            <a:avLst/>
+          </a:prstGeom>
+          <a:noFill/>
+          <a:ln/>
+        </p:spPr>
+        <p:txBody>
+          <a:bodyPr wrap="square" lIns="0" tIns="0" rIns="0" bIns="0" rtlCol="0" anchor="ctr"/>
+          <a:lstStyle/>
+          <a:p>
+            <a:pPr indent="0" marL="0">
+              <a:buNone/>
+            </a:pPr>
+            <a:r>
+              <a:rPr lang="en-US" sz="2800" b="1" dirty="0">
+                <a:solidFill>
+                  <a:srgbClr val="264653"/>
+                </a:solidFill>
+                <a:latin typeface="Meiryo" pitchFamily="34" charset="0"/>
+                <a:ea typeface="Meiryo" pitchFamily="34" charset="-122"/>
+                <a:cs typeface="Meiryo" pitchFamily="34" charset="-120"/>
+              </a:rPr>
+              <a:t>コメントスパムへの備え</a:t>
+            </a:r>
+            <a:endParaRPr lang="en-US" sz="2800" dirty="0"/>
+          </a:p>
+        </p:txBody>
+      </p:sp>
+      <p:sp>
+        <p:nvSpPr>
+          <p:cNvPr id="7" name="Text 4"/>
+          <p:cNvSpPr txBox="1"/>
+          <p:nvPr/>
+        </p:nvSpPr>
+        <p:spPr>
+          <a:xfrm>
+            <a:off x="1225296" y="914400"/>
+            <a:ext cx="10332720" cy="329184"/>
+          </a:xfrm>
+          <a:prstGeom prst="rect">
+            <a:avLst/>
+          </a:prstGeom>
+          <a:noFill/>
+          <a:ln/>
+        </p:spPr>
+        <p:txBody>
+          <a:bodyPr wrap="square" lIns="0" tIns="0" rIns="0" bIns="0" rtlCol="0" anchor="ctr"/>
+          <a:lstStyle/>
+          <a:p>
+            <a:pPr indent="0" marL="0">
+              <a:buNone/>
+            </a:pPr>
+            <a:r>
+              <a:rPr lang="en-US" sz="1400" dirty="0">
+                <a:solidFill>
+                  <a:srgbClr val="52707A"/>
+                </a:solidFill>
+                <a:latin typeface="Meiryo" pitchFamily="34" charset="0"/>
+                <a:ea typeface="Meiryo" pitchFamily="34" charset="-122"/>
+                <a:cs typeface="Meiryo" pitchFamily="34" charset="-120"/>
+              </a:rPr>
+              <a:t>放置しても表示されませんが、溜まると見落としの原因になります</a:t>
+            </a:r>
+            <a:endParaRPr lang="en-US" sz="1400" dirty="0"/>
+          </a:p>
+        </p:txBody>
+      </p:sp>
+      <p:sp>
+        <p:nvSpPr>
+          <p:cNvPr id="8" name="Text 5"/>
+          <p:cNvSpPr txBox="1"/>
+          <p:nvPr/>
+        </p:nvSpPr>
+        <p:spPr>
+          <a:xfrm>
+            <a:off x="11384280" y="6355080"/>
+            <a:ext cx="411480" cy="256032"/>
+          </a:xfrm>
+          <a:prstGeom prst="rect">
+            <a:avLst/>
+          </a:prstGeom>
+          <a:noFill/>
+          <a:ln/>
+        </p:spPr>
+        <p:txBody>
+          <a:bodyPr wrap="square" lIns="0" tIns="0" rIns="0" bIns="0" rtlCol="0" anchor="ctr"/>
+          <a:lstStyle/>
+          <a:p>
+            <a:pPr algn="r" indent="0" marL="0">
+              <a:buNone/>
+            </a:pPr>
+            <a:r>
+              <a:rPr lang="en-US" sz="1050" dirty="0">
+                <a:solidFill>
+                  <a:srgbClr val="A8B4B8"/>
+                </a:solidFill>
+                <a:latin typeface="Meiryo" pitchFamily="34" charset="0"/>
+                <a:ea typeface="Meiryo" pitchFamily="34" charset="-122"/>
+                <a:cs typeface="Meiryo" pitchFamily="34" charset="-120"/>
+              </a:rPr>
+              <a:t>12</a:t>
+            </a:r>
+            <a:endParaRPr lang="en-US" sz="1050" dirty="0"/>
+          </a:p>
+        </p:txBody>
+      </p:sp>
+      <p:pic>
+        <p:nvPicPr>
+          <p:cNvPr id="9" name="Image 1" descr="/sessions/compassionate-sweet-heisenberg/mnt/dev-aspath-life-main/_wp移行素材/★引継ぎ資料/画像/03_コメント.jpg">    </p:cNvPr>
+          <p:cNvPicPr>
+            <a:picLocks noChangeAspect="1"/>
+          </p:cNvPicPr>
+          <p:nvPr/>
+        </p:nvPicPr>
+        <p:blipFill>
+          <a:blip r:embed="rId2"/>
+          <a:stretch>
+            <a:fillRect/>
+          </a:stretch>
+        </p:blipFill>
+        <p:spPr>
+          <a:xfrm>
             <a:off x="594360" y="1463040"/>
             <a:ext cx="6309360" cy="3074203"/>
           </a:xfrm>
@@ -6017,7 +6437,7 @@
       </p:pic>
       <p:sp>
         <p:nvSpPr>
-          <p:cNvPr id="8" name="Shape 5"/>
+          <p:cNvPr id="10" name="Shape 6"/>
           <p:cNvSpPr/>
           <p:nvPr/>
         </p:nvSpPr>
@@ -6044,7 +6464,7 @@
       </p:sp>
       <p:sp>
         <p:nvSpPr>
-          <p:cNvPr id="9" name="Text 6"/>
+          <p:cNvPr id="11" name="Text 7"/>
           <p:cNvSpPr txBox="1"/>
           <p:nvPr/>
         </p:nvSpPr>
@@ -6083,7 +6503,7 @@
       </p:sp>
       <p:sp>
         <p:nvSpPr>
-          <p:cNvPr id="10" name="Text 7"/>
+          <p:cNvPr id="12" name="Text 8"/>
           <p:cNvSpPr txBox="1"/>
           <p:nvPr/>
         </p:nvSpPr>
@@ -6189,7 +6609,7 @@
       </p:sp>
       <p:sp>
         <p:nvSpPr>
-          <p:cNvPr id="11" name="Shape 8"/>
+          <p:cNvPr id="13" name="Shape 9"/>
           <p:cNvSpPr/>
           <p:nvPr/>
         </p:nvSpPr>
@@ -6216,7 +6636,7 @@
       </p:sp>
       <p:sp>
         <p:nvSpPr>
-          <p:cNvPr id="12" name="Shape 9"/>
+          <p:cNvPr id="14" name="Shape 10"/>
           <p:cNvSpPr/>
           <p:nvPr/>
         </p:nvSpPr>
@@ -6236,7 +6656,7 @@
       </p:sp>
       <p:sp>
         <p:nvSpPr>
-          <p:cNvPr id="13" name="Text 10"/>
+          <p:cNvPr id="15" name="Text 11"/>
           <p:cNvSpPr txBox="1"/>
           <p:nvPr/>
         </p:nvSpPr>
@@ -6275,7 +6695,7 @@
       </p:sp>
       <p:sp>
         <p:nvSpPr>
-          <p:cNvPr id="14" name="Text 11"/>
+          <p:cNvPr id="16" name="Text 12"/>
           <p:cNvSpPr txBox="1"/>
           <p:nvPr/>
         </p:nvSpPr>
@@ -6337,7 +6757,7 @@
       </p:sp>
       <p:sp>
         <p:nvSpPr>
-          <p:cNvPr id="15" name="Shape 12"/>
+          <p:cNvPr id="17" name="Shape 13"/>
           <p:cNvSpPr/>
           <p:nvPr/>
         </p:nvSpPr>
@@ -6364,7 +6784,7 @@
       </p:sp>
       <p:sp>
         <p:nvSpPr>
-          <p:cNvPr id="16" name="Shape 13"/>
+          <p:cNvPr id="18" name="Shape 14"/>
           <p:cNvSpPr/>
           <p:nvPr/>
         </p:nvSpPr>
@@ -6384,7 +6804,7 @@
       </p:sp>
       <p:sp>
         <p:nvSpPr>
-          <p:cNvPr id="17" name="Text 14"/>
+          <p:cNvPr id="19" name="Text 15"/>
           <p:cNvSpPr txBox="1"/>
           <p:nvPr/>
         </p:nvSpPr>
@@ -6423,7 +6843,7 @@
       </p:sp>
       <p:sp>
         <p:nvSpPr>
-          <p:cNvPr id="18" name="Text 15"/>
+          <p:cNvPr id="20" name="Text 16"/>
           <p:cNvSpPr txBox="1"/>
           <p:nvPr/>
         </p:nvSpPr>
@@ -6515,9 +6935,72 @@
           <a:chExt cx="0" cy="0"/>
         </a:xfrm>
       </p:grpSpPr>
-      <p:sp>
-        <p:nvSpPr>
-          <p:cNvPr id="2" name="Shape 0"/>
+      <p:pic>
+        <p:nvPicPr>
+          <p:cNvPr id="2" name="Image 0" descr="/sessions/compassionate-sweet-heisenberg/mnt/dev-aspath-life-main/tools/assets/logo-deck.png">    </p:cNvPr>
+          <p:cNvPicPr>
+            <a:picLocks noChangeAspect="1"/>
+          </p:cNvPicPr>
+          <p:nvPr/>
+        </p:nvPicPr>
+        <p:blipFill>
+          <a:blip r:embed="rId1"/>
+          <a:stretch>
+            <a:fillRect/>
+          </a:stretch>
+        </p:blipFill>
+        <p:spPr>
+          <a:xfrm>
+            <a:off x="11458173" y="109728"/>
+            <a:ext cx="209571" cy="256032"/>
+          </a:xfrm>
+          <a:prstGeom prst="rect">
+            <a:avLst/>
+          </a:prstGeom>
+        </p:spPr>
+      </p:pic>
+      <p:sp>
+        <p:nvSpPr>
+          <p:cNvPr id="3" name="Text 0"/>
+          <p:cNvSpPr txBox="1"/>
+          <p:nvPr/>
+        </p:nvSpPr>
+        <p:spPr>
+          <a:xfrm>
+            <a:off x="8623533" y="128016"/>
+            <a:ext cx="2743200" cy="237744"/>
+          </a:xfrm>
+          <a:prstGeom prst="rect">
+            <a:avLst/>
+          </a:prstGeom>
+          <a:noFill/>
+          <a:ln/>
+        </p:spPr>
+        <p:txBody>
+          <a:bodyPr wrap="square" lIns="0" tIns="0" rIns="0" bIns="0" rtlCol="0" anchor="ctr"/>
+          <a:lstStyle/>
+          <a:p>
+            <a:pPr algn="r" indent="0" marL="0">
+              <a:buNone/>
+            </a:pPr>
+            <a:r>
+              <a:rPr lang="en-US" sz="750" dirty="0">
+                <a:solidFill>
+                  <a:srgbClr val="97A9AF"/>
+                </a:solidFill>
+                <a:latin typeface="Meiryo" pitchFamily="34" charset="0"/>
+                <a:ea typeface="Meiryo" pitchFamily="34" charset="-122"/>
+                <a:cs typeface="Meiryo" pitchFamily="34" charset="-120"/>
+              </a:rPr>
+              <a:t>鹿児島のパーキンソン病専門トレーニングスタジオ</a:t>
+            </a:r>
+            <a:endParaRPr lang="en-US" sz="750" dirty="0"/>
+          </a:p>
+        </p:txBody>
+      </p:sp>
+      <p:sp>
+        <p:nvSpPr>
+          <p:cNvPr id="4" name="Shape 1"/>
           <p:cNvSpPr/>
           <p:nvPr/>
         </p:nvSpPr>
@@ -6539,7 +7022,7 @@
       </p:sp>
       <p:sp>
         <p:nvSpPr>
-          <p:cNvPr id="3" name="Text 1"/>
+          <p:cNvPr id="5" name="Text 2"/>
           <p:cNvSpPr txBox="1"/>
           <p:nvPr/>
         </p:nvSpPr>
@@ -6578,7 +7061,7 @@
       </p:sp>
       <p:sp>
         <p:nvSpPr>
-          <p:cNvPr id="4" name="Text 2"/>
+          <p:cNvPr id="6" name="Text 3"/>
           <p:cNvSpPr txBox="1"/>
           <p:nvPr/>
         </p:nvSpPr>
@@ -6617,7 +7100,7 @@
       </p:sp>
       <p:sp>
         <p:nvSpPr>
-          <p:cNvPr id="5" name="Text 3"/>
+          <p:cNvPr id="7" name="Text 4"/>
           <p:cNvSpPr txBox="1"/>
           <p:nvPr/>
         </p:nvSpPr>
@@ -6656,7 +7139,7 @@
       </p:sp>
       <p:sp>
         <p:nvSpPr>
-          <p:cNvPr id="6" name="Text 4"/>
+          <p:cNvPr id="8" name="Text 5"/>
           <p:cNvSpPr txBox="1"/>
           <p:nvPr/>
         </p:nvSpPr>
@@ -6695,7 +7178,7 @@
       </p:sp>
       <p:sp>
         <p:nvSpPr>
-          <p:cNvPr id="7" name="Shape 5"/>
+          <p:cNvPr id="9" name="Shape 6"/>
           <p:cNvSpPr/>
           <p:nvPr/>
         </p:nvSpPr>
@@ -6722,7 +7205,7 @@
       </p:sp>
       <p:sp>
         <p:nvSpPr>
-          <p:cNvPr id="8" name="Text 6"/>
+          <p:cNvPr id="10" name="Text 7"/>
           <p:cNvSpPr txBox="1"/>
           <p:nvPr/>
         </p:nvSpPr>
@@ -6761,7 +7244,7 @@
       </p:sp>
       <p:sp>
         <p:nvSpPr>
-          <p:cNvPr id="9" name="Text 7"/>
+          <p:cNvPr id="11" name="Text 8"/>
           <p:cNvSpPr txBox="1"/>
           <p:nvPr/>
         </p:nvSpPr>
@@ -6803,7 +7286,7 @@
       </p:sp>
       <p:sp>
         <p:nvSpPr>
-          <p:cNvPr id="10" name="Shape 8"/>
+          <p:cNvPr id="12" name="Shape 9"/>
           <p:cNvSpPr/>
           <p:nvPr/>
         </p:nvSpPr>
@@ -6825,7 +7308,7 @@
       </p:sp>
       <p:sp>
         <p:nvSpPr>
-          <p:cNvPr id="11" name="Text 9"/>
+          <p:cNvPr id="13" name="Text 10"/>
           <p:cNvSpPr txBox="1"/>
           <p:nvPr/>
         </p:nvSpPr>
@@ -6867,7 +7350,7 @@
       </p:sp>
       <p:sp>
         <p:nvSpPr>
-          <p:cNvPr id="12" name="Shape 10"/>
+          <p:cNvPr id="14" name="Shape 11"/>
           <p:cNvSpPr/>
           <p:nvPr/>
         </p:nvSpPr>
@@ -6894,7 +7377,7 @@
       </p:sp>
       <p:sp>
         <p:nvSpPr>
-          <p:cNvPr id="13" name="Text 11"/>
+          <p:cNvPr id="15" name="Text 12"/>
           <p:cNvSpPr txBox="1"/>
           <p:nvPr/>
         </p:nvSpPr>
@@ -6933,7 +7416,7 @@
       </p:sp>
       <p:sp>
         <p:nvSpPr>
-          <p:cNvPr id="14" name="Text 12"/>
+          <p:cNvPr id="16" name="Text 13"/>
           <p:cNvSpPr txBox="1"/>
           <p:nvPr/>
         </p:nvSpPr>
@@ -6975,7 +7458,7 @@
       </p:sp>
       <p:sp>
         <p:nvSpPr>
-          <p:cNvPr id="15" name="Shape 13"/>
+          <p:cNvPr id="17" name="Shape 14"/>
           <p:cNvSpPr/>
           <p:nvPr/>
         </p:nvSpPr>
@@ -6997,7 +7480,7 @@
       </p:sp>
       <p:sp>
         <p:nvSpPr>
-          <p:cNvPr id="16" name="Text 14"/>
+          <p:cNvPr id="18" name="Text 15"/>
           <p:cNvSpPr txBox="1"/>
           <p:nvPr/>
         </p:nvSpPr>
@@ -7039,7 +7522,7 @@
       </p:sp>
       <p:sp>
         <p:nvSpPr>
-          <p:cNvPr id="17" name="Shape 15"/>
+          <p:cNvPr id="19" name="Shape 16"/>
           <p:cNvSpPr/>
           <p:nvPr/>
         </p:nvSpPr>
@@ -7066,7 +7549,7 @@
       </p:sp>
       <p:sp>
         <p:nvSpPr>
-          <p:cNvPr id="18" name="Text 16"/>
+          <p:cNvPr id="20" name="Text 17"/>
           <p:cNvSpPr txBox="1"/>
           <p:nvPr/>
         </p:nvSpPr>
@@ -7105,7 +7588,7 @@
       </p:sp>
       <p:sp>
         <p:nvSpPr>
-          <p:cNvPr id="19" name="Text 17"/>
+          <p:cNvPr id="21" name="Text 18"/>
           <p:cNvSpPr txBox="1"/>
           <p:nvPr/>
         </p:nvSpPr>
@@ -7147,7 +7630,7 @@
       </p:sp>
       <p:sp>
         <p:nvSpPr>
-          <p:cNvPr id="20" name="Shape 18"/>
+          <p:cNvPr id="22" name="Shape 19"/>
           <p:cNvSpPr/>
           <p:nvPr/>
         </p:nvSpPr>
@@ -7169,7 +7652,7 @@
       </p:sp>
       <p:sp>
         <p:nvSpPr>
-          <p:cNvPr id="21" name="Text 19"/>
+          <p:cNvPr id="23" name="Text 20"/>
           <p:cNvSpPr txBox="1"/>
           <p:nvPr/>
         </p:nvSpPr>
@@ -7211,7 +7694,7 @@
       </p:sp>
       <p:sp>
         <p:nvSpPr>
-          <p:cNvPr id="22" name="Shape 20"/>
+          <p:cNvPr id="24" name="Shape 21"/>
           <p:cNvSpPr/>
           <p:nvPr/>
         </p:nvSpPr>
@@ -7238,7 +7721,7 @@
       </p:sp>
       <p:sp>
         <p:nvSpPr>
-          <p:cNvPr id="23" name="Text 21"/>
+          <p:cNvPr id="25" name="Text 22"/>
           <p:cNvSpPr txBox="1"/>
           <p:nvPr/>
         </p:nvSpPr>
@@ -7277,7 +7760,7 @@
       </p:sp>
       <p:sp>
         <p:nvSpPr>
-          <p:cNvPr id="24" name="Text 22"/>
+          <p:cNvPr id="26" name="Text 23"/>
           <p:cNvSpPr txBox="1"/>
           <p:nvPr/>
         </p:nvSpPr>
@@ -7319,7 +7802,7 @@
       </p:sp>
       <p:sp>
         <p:nvSpPr>
-          <p:cNvPr id="25" name="Shape 23"/>
+          <p:cNvPr id="27" name="Shape 24"/>
           <p:cNvSpPr/>
           <p:nvPr/>
         </p:nvSpPr>
@@ -7341,7 +7824,7 @@
       </p:sp>
       <p:sp>
         <p:nvSpPr>
-          <p:cNvPr id="26" name="Text 24"/>
+          <p:cNvPr id="28" name="Text 25"/>
           <p:cNvSpPr txBox="1"/>
           <p:nvPr/>
         </p:nvSpPr>
@@ -7383,7 +7866,7 @@
       </p:sp>
       <p:sp>
         <p:nvSpPr>
-          <p:cNvPr id="27" name="Shape 25"/>
+          <p:cNvPr id="29" name="Shape 26"/>
           <p:cNvSpPr/>
           <p:nvPr/>
         </p:nvSpPr>
@@ -7410,7 +7893,7 @@
       </p:sp>
       <p:sp>
         <p:nvSpPr>
-          <p:cNvPr id="28" name="Shape 26"/>
+          <p:cNvPr id="30" name="Shape 27"/>
           <p:cNvSpPr/>
           <p:nvPr/>
         </p:nvSpPr>
@@ -7430,7 +7913,7 @@
       </p:sp>
       <p:sp>
         <p:nvSpPr>
-          <p:cNvPr id="29" name="Text 27"/>
+          <p:cNvPr id="31" name="Text 28"/>
           <p:cNvSpPr txBox="1"/>
           <p:nvPr/>
         </p:nvSpPr>
@@ -7469,7 +7952,7 @@
       </p:sp>
       <p:sp>
         <p:nvSpPr>
-          <p:cNvPr id="30" name="Text 28"/>
+          <p:cNvPr id="32" name="Text 29"/>
           <p:cNvSpPr txBox="1"/>
           <p:nvPr/>
         </p:nvSpPr>
@@ -7561,9 +8044,72 @@
           <a:chExt cx="0" cy="0"/>
         </a:xfrm>
       </p:grpSpPr>
-      <p:sp>
-        <p:nvSpPr>
-          <p:cNvPr id="2" name="Text 0"/>
+      <p:pic>
+        <p:nvPicPr>
+          <p:cNvPr id="2" name="Image 0" descr="/sessions/compassionate-sweet-heisenberg/mnt/dev-aspath-life-main/tools/assets/logo-deck.png">    </p:cNvPr>
+          <p:cNvPicPr>
+            <a:picLocks noChangeAspect="1"/>
+          </p:cNvPicPr>
+          <p:nvPr/>
+        </p:nvPicPr>
+        <p:blipFill>
+          <a:blip r:embed="rId1"/>
+          <a:stretch>
+            <a:fillRect/>
+          </a:stretch>
+        </p:blipFill>
+        <p:spPr>
+          <a:xfrm>
+            <a:off x="11458173" y="109728"/>
+            <a:ext cx="209571" cy="256032"/>
+          </a:xfrm>
+          <a:prstGeom prst="rect">
+            <a:avLst/>
+          </a:prstGeom>
+        </p:spPr>
+      </p:pic>
+      <p:sp>
+        <p:nvSpPr>
+          <p:cNvPr id="3" name="Text 0"/>
+          <p:cNvSpPr txBox="1"/>
+          <p:nvPr/>
+        </p:nvSpPr>
+        <p:spPr>
+          <a:xfrm>
+            <a:off x="8623533" y="128016"/>
+            <a:ext cx="2743200" cy="237744"/>
+          </a:xfrm>
+          <a:prstGeom prst="rect">
+            <a:avLst/>
+          </a:prstGeom>
+          <a:noFill/>
+          <a:ln/>
+        </p:spPr>
+        <p:txBody>
+          <a:bodyPr wrap="square" lIns="0" tIns="0" rIns="0" bIns="0" rtlCol="0" anchor="ctr"/>
+          <a:lstStyle/>
+          <a:p>
+            <a:pPr algn="r" indent="0" marL="0">
+              <a:buNone/>
+            </a:pPr>
+            <a:r>
+              <a:rPr lang="en-US" sz="750" dirty="0">
+                <a:solidFill>
+                  <a:srgbClr val="97A9AF"/>
+                </a:solidFill>
+                <a:latin typeface="Meiryo" pitchFamily="34" charset="0"/>
+                <a:ea typeface="Meiryo" pitchFamily="34" charset="-122"/>
+                <a:cs typeface="Meiryo" pitchFamily="34" charset="-120"/>
+              </a:rPr>
+              <a:t>鹿児島のパーキンソン病専門トレーニングスタジオ</a:t>
+            </a:r>
+            <a:endParaRPr lang="en-US" sz="750" dirty="0"/>
+          </a:p>
+        </p:txBody>
+      </p:sp>
+      <p:sp>
+        <p:nvSpPr>
+          <p:cNvPr id="4" name="Text 1"/>
           <p:cNvSpPr txBox="1"/>
           <p:nvPr/>
         </p:nvSpPr>
@@ -7591,7 +8137,7 @@
       </p:sp>
       <p:sp>
         <p:nvSpPr>
-          <p:cNvPr id="3" name="Text 1"/>
+          <p:cNvPr id="5" name="Text 2"/>
           <p:cNvSpPr txBox="1"/>
           <p:nvPr/>
         </p:nvSpPr>
@@ -7630,7 +8176,7 @@
       </p:sp>
       <p:sp>
         <p:nvSpPr>
-          <p:cNvPr id="4" name="Text 2"/>
+          <p:cNvPr id="6" name="Text 3"/>
           <p:cNvSpPr txBox="1"/>
           <p:nvPr/>
         </p:nvSpPr>
@@ -7669,7 +8215,7 @@
       </p:sp>
       <p:sp>
         <p:nvSpPr>
-          <p:cNvPr id="5" name="Shape 3"/>
+          <p:cNvPr id="7" name="Shape 4"/>
           <p:cNvSpPr/>
           <p:nvPr/>
         </p:nvSpPr>
@@ -7696,7 +8242,7 @@
       </p:sp>
       <p:sp>
         <p:nvSpPr>
-          <p:cNvPr id="6" name="Shape 4"/>
+          <p:cNvPr id="8" name="Shape 5"/>
           <p:cNvSpPr/>
           <p:nvPr/>
         </p:nvSpPr>
@@ -7718,7 +8264,7 @@
       </p:sp>
       <p:sp>
         <p:nvSpPr>
-          <p:cNvPr id="7" name="Text 5"/>
+          <p:cNvPr id="9" name="Text 6"/>
           <p:cNvSpPr txBox="1"/>
           <p:nvPr/>
         </p:nvSpPr>
@@ -7757,7 +8303,7 @@
       </p:sp>
       <p:sp>
         <p:nvSpPr>
-          <p:cNvPr id="8" name="Text 6"/>
+          <p:cNvPr id="10" name="Text 7"/>
           <p:cNvSpPr txBox="1"/>
           <p:nvPr/>
         </p:nvSpPr>
@@ -7796,7 +8342,7 @@
       </p:sp>
       <p:sp>
         <p:nvSpPr>
-          <p:cNvPr id="9" name="Text 7"/>
+          <p:cNvPr id="11" name="Text 8"/>
           <p:cNvSpPr txBox="1"/>
           <p:nvPr/>
         </p:nvSpPr>
@@ -7838,7 +8384,7 @@
       </p:sp>
       <p:sp>
         <p:nvSpPr>
-          <p:cNvPr id="10" name="Shape 8"/>
+          <p:cNvPr id="12" name="Shape 9"/>
           <p:cNvSpPr/>
           <p:nvPr/>
         </p:nvSpPr>
@@ -7865,7 +8411,7 @@
       </p:sp>
       <p:sp>
         <p:nvSpPr>
-          <p:cNvPr id="11" name="Shape 9"/>
+          <p:cNvPr id="13" name="Shape 10"/>
           <p:cNvSpPr/>
           <p:nvPr/>
         </p:nvSpPr>
@@ -7885,7 +8431,7 @@
       </p:sp>
       <p:sp>
         <p:nvSpPr>
-          <p:cNvPr id="12" name="Text 10"/>
+          <p:cNvPr id="14" name="Text 11"/>
           <p:cNvSpPr txBox="1"/>
           <p:nvPr/>
         </p:nvSpPr>
@@ -7924,7 +8470,7 @@
       </p:sp>
       <p:sp>
         <p:nvSpPr>
-          <p:cNvPr id="13" name="Text 11"/>
+          <p:cNvPr id="15" name="Text 12"/>
           <p:cNvSpPr txBox="1"/>
           <p:nvPr/>
         </p:nvSpPr>
@@ -7986,7 +8532,7 @@
       </p:sp>
       <p:sp>
         <p:nvSpPr>
-          <p:cNvPr id="14" name="Shape 12"/>
+          <p:cNvPr id="16" name="Shape 13"/>
           <p:cNvSpPr/>
           <p:nvPr/>
         </p:nvSpPr>
@@ -8013,7 +8559,7 @@
       </p:sp>
       <p:sp>
         <p:nvSpPr>
-          <p:cNvPr id="15" name="Shape 13"/>
+          <p:cNvPr id="17" name="Shape 14"/>
           <p:cNvSpPr/>
           <p:nvPr/>
         </p:nvSpPr>
@@ -8033,7 +8579,7 @@
       </p:sp>
       <p:sp>
         <p:nvSpPr>
-          <p:cNvPr id="16" name="Text 14"/>
+          <p:cNvPr id="18" name="Text 15"/>
           <p:cNvSpPr txBox="1"/>
           <p:nvPr/>
         </p:nvSpPr>
@@ -8072,7 +8618,7 @@
       </p:sp>
       <p:sp>
         <p:nvSpPr>
-          <p:cNvPr id="17" name="Text 15"/>
+          <p:cNvPr id="19" name="Text 16"/>
           <p:cNvSpPr txBox="1"/>
           <p:nvPr/>
         </p:nvSpPr>
@@ -8925,9 +9471,72 @@
           <a:chExt cx="0" cy="0"/>
         </a:xfrm>
       </p:grpSpPr>
-      <p:sp>
-        <p:nvSpPr>
-          <p:cNvPr id="2" name="Text 0"/>
+      <p:pic>
+        <p:nvPicPr>
+          <p:cNvPr id="2" name="Image 0" descr="/sessions/compassionate-sweet-heisenberg/mnt/dev-aspath-life-main/tools/assets/logo-deck.png">    </p:cNvPr>
+          <p:cNvPicPr>
+            <a:picLocks noChangeAspect="1"/>
+          </p:cNvPicPr>
+          <p:nvPr/>
+        </p:nvPicPr>
+        <p:blipFill>
+          <a:blip r:embed="rId1"/>
+          <a:stretch>
+            <a:fillRect/>
+          </a:stretch>
+        </p:blipFill>
+        <p:spPr>
+          <a:xfrm>
+            <a:off x="11458173" y="109728"/>
+            <a:ext cx="209571" cy="256032"/>
+          </a:xfrm>
+          <a:prstGeom prst="rect">
+            <a:avLst/>
+          </a:prstGeom>
+        </p:spPr>
+      </p:pic>
+      <p:sp>
+        <p:nvSpPr>
+          <p:cNvPr id="3" name="Text 0"/>
+          <p:cNvSpPr txBox="1"/>
+          <p:nvPr/>
+        </p:nvSpPr>
+        <p:spPr>
+          <a:xfrm>
+            <a:off x="8623533" y="128016"/>
+            <a:ext cx="2743200" cy="237744"/>
+          </a:xfrm>
+          <a:prstGeom prst="rect">
+            <a:avLst/>
+          </a:prstGeom>
+          <a:noFill/>
+          <a:ln/>
+        </p:spPr>
+        <p:txBody>
+          <a:bodyPr wrap="square" lIns="0" tIns="0" rIns="0" bIns="0" rtlCol="0" anchor="ctr"/>
+          <a:lstStyle/>
+          <a:p>
+            <a:pPr algn="r" indent="0" marL="0">
+              <a:buNone/>
+            </a:pPr>
+            <a:r>
+              <a:rPr lang="en-US" sz="750" dirty="0">
+                <a:solidFill>
+                  <a:srgbClr val="97A9AF"/>
+                </a:solidFill>
+                <a:latin typeface="Meiryo" pitchFamily="34" charset="0"/>
+                <a:ea typeface="Meiryo" pitchFamily="34" charset="-122"/>
+                <a:cs typeface="Meiryo" pitchFamily="34" charset="-120"/>
+              </a:rPr>
+              <a:t>鹿児島のパーキンソン病専門トレーニングスタジオ</a:t>
+            </a:r>
+            <a:endParaRPr lang="en-US" sz="750" dirty="0"/>
+          </a:p>
+        </p:txBody>
+      </p:sp>
+      <p:sp>
+        <p:nvSpPr>
+          <p:cNvPr id="4" name="Text 1"/>
           <p:cNvSpPr txBox="1"/>
           <p:nvPr/>
         </p:nvSpPr>
@@ -8966,7 +9575,7 @@
       </p:sp>
       <p:sp>
         <p:nvSpPr>
-          <p:cNvPr id="3" name="Text 1"/>
+          <p:cNvPr id="5" name="Text 2"/>
           <p:cNvSpPr txBox="1"/>
           <p:nvPr/>
         </p:nvSpPr>
@@ -9005,7 +9614,7 @@
       </p:sp>
       <p:sp>
         <p:nvSpPr>
-          <p:cNvPr id="4" name="Text 2"/>
+          <p:cNvPr id="6" name="Text 3"/>
           <p:cNvSpPr txBox="1"/>
           <p:nvPr/>
         </p:nvSpPr>
@@ -9044,7 +9653,7 @@
       </p:sp>
       <p:sp>
         <p:nvSpPr>
-          <p:cNvPr id="5" name="Shape 3"/>
+          <p:cNvPr id="7" name="Shape 4"/>
           <p:cNvSpPr/>
           <p:nvPr/>
         </p:nvSpPr>
@@ -9071,7 +9680,7 @@
       </p:sp>
       <p:sp>
         <p:nvSpPr>
-          <p:cNvPr id="6" name="Shape 4"/>
+          <p:cNvPr id="8" name="Shape 5"/>
           <p:cNvSpPr/>
           <p:nvPr/>
         </p:nvSpPr>
@@ -9093,7 +9702,7 @@
       </p:sp>
       <p:sp>
         <p:nvSpPr>
-          <p:cNvPr id="7" name="Text 5"/>
+          <p:cNvPr id="9" name="Text 6"/>
           <p:cNvSpPr txBox="1"/>
           <p:nvPr/>
         </p:nvSpPr>
@@ -9132,7 +9741,7 @@
       </p:sp>
       <p:sp>
         <p:nvSpPr>
-          <p:cNvPr id="8" name="Text 6"/>
+          <p:cNvPr id="10" name="Text 7"/>
           <p:cNvSpPr txBox="1"/>
           <p:nvPr/>
         </p:nvSpPr>
@@ -9171,7 +9780,7 @@
       </p:sp>
       <p:sp>
         <p:nvSpPr>
-          <p:cNvPr id="9" name="Text 7"/>
+          <p:cNvPr id="11" name="Text 8"/>
           <p:cNvSpPr txBox="1"/>
           <p:nvPr/>
         </p:nvSpPr>
@@ -9233,7 +9842,7 @@
       </p:sp>
       <p:sp>
         <p:nvSpPr>
-          <p:cNvPr id="10" name="Shape 8"/>
+          <p:cNvPr id="12" name="Shape 9"/>
           <p:cNvSpPr/>
           <p:nvPr/>
         </p:nvSpPr>
@@ -9260,7 +9869,7 @@
       </p:sp>
       <p:sp>
         <p:nvSpPr>
-          <p:cNvPr id="11" name="Shape 9"/>
+          <p:cNvPr id="13" name="Shape 10"/>
           <p:cNvSpPr/>
           <p:nvPr/>
         </p:nvSpPr>
@@ -9282,7 +9891,7 @@
       </p:sp>
       <p:sp>
         <p:nvSpPr>
-          <p:cNvPr id="12" name="Text 10"/>
+          <p:cNvPr id="14" name="Text 11"/>
           <p:cNvSpPr txBox="1"/>
           <p:nvPr/>
         </p:nvSpPr>
@@ -9321,7 +9930,7 @@
       </p:sp>
       <p:sp>
         <p:nvSpPr>
-          <p:cNvPr id="13" name="Text 11"/>
+          <p:cNvPr id="15" name="Text 12"/>
           <p:cNvSpPr txBox="1"/>
           <p:nvPr/>
         </p:nvSpPr>
@@ -9360,7 +9969,7 @@
       </p:sp>
       <p:sp>
         <p:nvSpPr>
-          <p:cNvPr id="14" name="Text 12"/>
+          <p:cNvPr id="16" name="Text 13"/>
           <p:cNvSpPr txBox="1"/>
           <p:nvPr/>
         </p:nvSpPr>
@@ -9422,7 +10031,7 @@
       </p:sp>
       <p:sp>
         <p:nvSpPr>
-          <p:cNvPr id="15" name="Shape 13"/>
+          <p:cNvPr id="17" name="Shape 14"/>
           <p:cNvSpPr/>
           <p:nvPr/>
         </p:nvSpPr>
@@ -9449,7 +10058,7 @@
       </p:sp>
       <p:sp>
         <p:nvSpPr>
-          <p:cNvPr id="16" name="Shape 14"/>
+          <p:cNvPr id="18" name="Shape 15"/>
           <p:cNvSpPr/>
           <p:nvPr/>
         </p:nvSpPr>
@@ -9471,7 +10080,7 @@
       </p:sp>
       <p:sp>
         <p:nvSpPr>
-          <p:cNvPr id="17" name="Text 15"/>
+          <p:cNvPr id="19" name="Text 16"/>
           <p:cNvSpPr txBox="1"/>
           <p:nvPr/>
         </p:nvSpPr>
@@ -9510,7 +10119,7 @@
       </p:sp>
       <p:sp>
         <p:nvSpPr>
-          <p:cNvPr id="18" name="Text 16"/>
+          <p:cNvPr id="20" name="Text 17"/>
           <p:cNvSpPr txBox="1"/>
           <p:nvPr/>
         </p:nvSpPr>
@@ -9549,7 +10158,7 @@
       </p:sp>
       <p:sp>
         <p:nvSpPr>
-          <p:cNvPr id="19" name="Text 17"/>
+          <p:cNvPr id="21" name="Text 18"/>
           <p:cNvSpPr txBox="1"/>
           <p:nvPr/>
         </p:nvSpPr>
@@ -9611,7 +10220,7 @@
       </p:sp>
       <p:sp>
         <p:nvSpPr>
-          <p:cNvPr id="20" name="Shape 18"/>
+          <p:cNvPr id="22" name="Shape 19"/>
           <p:cNvSpPr/>
           <p:nvPr/>
         </p:nvSpPr>
@@ -9638,7 +10247,7 @@
       </p:sp>
       <p:sp>
         <p:nvSpPr>
-          <p:cNvPr id="21" name="Shape 19"/>
+          <p:cNvPr id="23" name="Shape 20"/>
           <p:cNvSpPr/>
           <p:nvPr/>
         </p:nvSpPr>
@@ -9658,7 +10267,7 @@
       </p:sp>
       <p:sp>
         <p:nvSpPr>
-          <p:cNvPr id="22" name="Text 20"/>
+          <p:cNvPr id="24" name="Text 21"/>
           <p:cNvSpPr txBox="1"/>
           <p:nvPr/>
         </p:nvSpPr>
@@ -9697,7 +10306,7 @@
       </p:sp>
       <p:sp>
         <p:nvSpPr>
-          <p:cNvPr id="23" name="Text 21"/>
+          <p:cNvPr id="25" name="Text 22"/>
           <p:cNvSpPr txBox="1"/>
           <p:nvPr/>
         </p:nvSpPr>
@@ -10048,9 +10657,72 @@
           <a:chExt cx="0" cy="0"/>
         </a:xfrm>
       </p:grpSpPr>
-      <p:sp>
-        <p:nvSpPr>
-          <p:cNvPr id="2" name="Shape 0"/>
+      <p:pic>
+        <p:nvPicPr>
+          <p:cNvPr id="2" name="Image 0" descr="/sessions/compassionate-sweet-heisenberg/mnt/dev-aspath-life-main/tools/assets/logo-deck.png">    </p:cNvPr>
+          <p:cNvPicPr>
+            <a:picLocks noChangeAspect="1"/>
+          </p:cNvPicPr>
+          <p:nvPr/>
+        </p:nvPicPr>
+        <p:blipFill>
+          <a:blip r:embed="rId1"/>
+          <a:stretch>
+            <a:fillRect/>
+          </a:stretch>
+        </p:blipFill>
+        <p:spPr>
+          <a:xfrm>
+            <a:off x="11458173" y="109728"/>
+            <a:ext cx="209571" cy="256032"/>
+          </a:xfrm>
+          <a:prstGeom prst="rect">
+            <a:avLst/>
+          </a:prstGeom>
+        </p:spPr>
+      </p:pic>
+      <p:sp>
+        <p:nvSpPr>
+          <p:cNvPr id="3" name="Text 0"/>
+          <p:cNvSpPr txBox="1"/>
+          <p:nvPr/>
+        </p:nvSpPr>
+        <p:spPr>
+          <a:xfrm>
+            <a:off x="8623533" y="128016"/>
+            <a:ext cx="2743200" cy="237744"/>
+          </a:xfrm>
+          <a:prstGeom prst="rect">
+            <a:avLst/>
+          </a:prstGeom>
+          <a:noFill/>
+          <a:ln/>
+        </p:spPr>
+        <p:txBody>
+          <a:bodyPr wrap="square" lIns="0" tIns="0" rIns="0" bIns="0" rtlCol="0" anchor="ctr"/>
+          <a:lstStyle/>
+          <a:p>
+            <a:pPr algn="r" indent="0" marL="0">
+              <a:buNone/>
+            </a:pPr>
+            <a:r>
+              <a:rPr lang="en-US" sz="750" dirty="0">
+                <a:solidFill>
+                  <a:srgbClr val="97A9AF"/>
+                </a:solidFill>
+                <a:latin typeface="Meiryo" pitchFamily="34" charset="0"/>
+                <a:ea typeface="Meiryo" pitchFamily="34" charset="-122"/>
+                <a:cs typeface="Meiryo" pitchFamily="34" charset="-120"/>
+              </a:rPr>
+              <a:t>鹿児島のパーキンソン病専門トレーニングスタジオ</a:t>
+            </a:r>
+            <a:endParaRPr lang="en-US" sz="750" dirty="0"/>
+          </a:p>
+        </p:txBody>
+      </p:sp>
+      <p:sp>
+        <p:nvSpPr>
+          <p:cNvPr id="4" name="Shape 1"/>
           <p:cNvSpPr/>
           <p:nvPr/>
         </p:nvSpPr>
@@ -10072,7 +10744,7 @@
       </p:sp>
       <p:sp>
         <p:nvSpPr>
-          <p:cNvPr id="3" name="Text 1"/>
+          <p:cNvPr id="5" name="Text 2"/>
           <p:cNvSpPr txBox="1"/>
           <p:nvPr/>
         </p:nvSpPr>
@@ -10111,7 +10783,7 @@
       </p:sp>
       <p:sp>
         <p:nvSpPr>
-          <p:cNvPr id="4" name="Text 2"/>
+          <p:cNvPr id="6" name="Text 3"/>
           <p:cNvSpPr txBox="1"/>
           <p:nvPr/>
         </p:nvSpPr>
@@ -10150,7 +10822,7 @@
       </p:sp>
       <p:sp>
         <p:nvSpPr>
-          <p:cNvPr id="5" name="Text 3"/>
+          <p:cNvPr id="7" name="Text 4"/>
           <p:cNvSpPr txBox="1"/>
           <p:nvPr/>
         </p:nvSpPr>
@@ -10189,7 +10861,7 @@
       </p:sp>
       <p:sp>
         <p:nvSpPr>
-          <p:cNvPr id="6" name="Text 4"/>
+          <p:cNvPr id="8" name="Text 5"/>
           <p:cNvSpPr txBox="1"/>
           <p:nvPr/>
         </p:nvSpPr>
@@ -10228,7 +10900,7 @@
       </p:sp>
       <p:sp>
         <p:nvSpPr>
-          <p:cNvPr id="7" name="Shape 5"/>
+          <p:cNvPr id="9" name="Shape 6"/>
           <p:cNvSpPr/>
           <p:nvPr/>
         </p:nvSpPr>
@@ -10255,7 +10927,7 @@
       </p:sp>
       <p:sp>
         <p:nvSpPr>
-          <p:cNvPr id="8" name="Text 6"/>
+          <p:cNvPr id="10" name="Text 7"/>
           <p:cNvSpPr txBox="1"/>
           <p:nvPr/>
         </p:nvSpPr>
@@ -10294,7 +10966,7 @@
       </p:sp>
       <p:sp>
         <p:nvSpPr>
-          <p:cNvPr id="9" name="Text 7"/>
+          <p:cNvPr id="11" name="Text 8"/>
           <p:cNvSpPr txBox="1"/>
           <p:nvPr/>
         </p:nvSpPr>
@@ -10333,7 +11005,7 @@
       </p:sp>
       <p:sp>
         <p:nvSpPr>
-          <p:cNvPr id="10" name="Text 8"/>
+          <p:cNvPr id="12" name="Text 9"/>
           <p:cNvSpPr txBox="1"/>
           <p:nvPr/>
         </p:nvSpPr>
@@ -10372,7 +11044,7 @@
       </p:sp>
       <p:sp>
         <p:nvSpPr>
-          <p:cNvPr id="11" name="Text 9"/>
+          <p:cNvPr id="13" name="Text 10"/>
           <p:cNvSpPr txBox="1"/>
           <p:nvPr/>
         </p:nvSpPr>
@@ -10414,7 +11086,7 @@
       </p:sp>
       <p:sp>
         <p:nvSpPr>
-          <p:cNvPr id="12" name="Shape 10"/>
+          <p:cNvPr id="14" name="Shape 11"/>
           <p:cNvSpPr/>
           <p:nvPr/>
         </p:nvSpPr>
@@ -10441,7 +11113,7 @@
       </p:sp>
       <p:sp>
         <p:nvSpPr>
-          <p:cNvPr id="13" name="Text 11"/>
+          <p:cNvPr id="15" name="Text 12"/>
           <p:cNvSpPr txBox="1"/>
           <p:nvPr/>
         </p:nvSpPr>
@@ -10480,7 +11152,7 @@
       </p:sp>
       <p:sp>
         <p:nvSpPr>
-          <p:cNvPr id="14" name="Text 12"/>
+          <p:cNvPr id="16" name="Text 13"/>
           <p:cNvSpPr txBox="1"/>
           <p:nvPr/>
         </p:nvSpPr>
@@ -10519,7 +11191,7 @@
       </p:sp>
       <p:sp>
         <p:nvSpPr>
-          <p:cNvPr id="15" name="Text 13"/>
+          <p:cNvPr id="17" name="Text 14"/>
           <p:cNvSpPr txBox="1"/>
           <p:nvPr/>
         </p:nvSpPr>
@@ -10558,7 +11230,7 @@
       </p:sp>
       <p:sp>
         <p:nvSpPr>
-          <p:cNvPr id="16" name="Text 14"/>
+          <p:cNvPr id="18" name="Text 15"/>
           <p:cNvSpPr txBox="1"/>
           <p:nvPr/>
         </p:nvSpPr>
@@ -10600,7 +11272,7 @@
       </p:sp>
       <p:sp>
         <p:nvSpPr>
-          <p:cNvPr id="17" name="Shape 15"/>
+          <p:cNvPr id="19" name="Shape 16"/>
           <p:cNvSpPr/>
           <p:nvPr/>
         </p:nvSpPr>
@@ -10627,7 +11299,7 @@
       </p:sp>
       <p:sp>
         <p:nvSpPr>
-          <p:cNvPr id="18" name="Text 16"/>
+          <p:cNvPr id="20" name="Text 17"/>
           <p:cNvSpPr txBox="1"/>
           <p:nvPr/>
         </p:nvSpPr>
@@ -10666,7 +11338,7 @@
       </p:sp>
       <p:sp>
         <p:nvSpPr>
-          <p:cNvPr id="19" name="Text 17"/>
+          <p:cNvPr id="21" name="Text 18"/>
           <p:cNvSpPr txBox="1"/>
           <p:nvPr/>
         </p:nvSpPr>
@@ -10705,7 +11377,7 @@
       </p:sp>
       <p:sp>
         <p:nvSpPr>
-          <p:cNvPr id="20" name="Text 18"/>
+          <p:cNvPr id="22" name="Text 19"/>
           <p:cNvSpPr txBox="1"/>
           <p:nvPr/>
         </p:nvSpPr>
@@ -10744,7 +11416,7 @@
       </p:sp>
       <p:sp>
         <p:nvSpPr>
-          <p:cNvPr id="21" name="Text 19"/>
+          <p:cNvPr id="23" name="Text 20"/>
           <p:cNvSpPr txBox="1"/>
           <p:nvPr/>
         </p:nvSpPr>
@@ -10786,7 +11458,7 @@
       </p:sp>
       <p:sp>
         <p:nvSpPr>
-          <p:cNvPr id="22" name="Shape 20"/>
+          <p:cNvPr id="24" name="Shape 21"/>
           <p:cNvSpPr/>
           <p:nvPr/>
         </p:nvSpPr>
@@ -10813,7 +11485,7 @@
       </p:sp>
       <p:sp>
         <p:nvSpPr>
-          <p:cNvPr id="23" name="Text 21"/>
+          <p:cNvPr id="25" name="Text 22"/>
           <p:cNvSpPr txBox="1"/>
           <p:nvPr/>
         </p:nvSpPr>
@@ -10852,7 +11524,7 @@
       </p:sp>
       <p:sp>
         <p:nvSpPr>
-          <p:cNvPr id="24" name="Text 22"/>
+          <p:cNvPr id="26" name="Text 23"/>
           <p:cNvSpPr txBox="1"/>
           <p:nvPr/>
         </p:nvSpPr>
@@ -10891,7 +11563,7 @@
       </p:sp>
       <p:sp>
         <p:nvSpPr>
-          <p:cNvPr id="25" name="Text 23"/>
+          <p:cNvPr id="27" name="Text 24"/>
           <p:cNvSpPr txBox="1"/>
           <p:nvPr/>
         </p:nvSpPr>
@@ -10930,7 +11602,7 @@
       </p:sp>
       <p:sp>
         <p:nvSpPr>
-          <p:cNvPr id="26" name="Text 24"/>
+          <p:cNvPr id="28" name="Text 25"/>
           <p:cNvSpPr txBox="1"/>
           <p:nvPr/>
         </p:nvSpPr>
@@ -10972,7 +11644,7 @@
       </p:sp>
       <p:sp>
         <p:nvSpPr>
-          <p:cNvPr id="27" name="Shape 25"/>
+          <p:cNvPr id="29" name="Shape 26"/>
           <p:cNvSpPr/>
           <p:nvPr/>
         </p:nvSpPr>
@@ -10999,7 +11671,7 @@
       </p:sp>
       <p:sp>
         <p:nvSpPr>
-          <p:cNvPr id="28" name="Shape 26"/>
+          <p:cNvPr id="30" name="Shape 27"/>
           <p:cNvSpPr/>
           <p:nvPr/>
         </p:nvSpPr>
@@ -11019,7 +11691,7 @@
       </p:sp>
       <p:sp>
         <p:nvSpPr>
-          <p:cNvPr id="29" name="Text 27"/>
+          <p:cNvPr id="31" name="Text 28"/>
           <p:cNvSpPr txBox="1"/>
           <p:nvPr/>
         </p:nvSpPr>
@@ -11058,7 +11730,7 @@
       </p:sp>
       <p:sp>
         <p:nvSpPr>
-          <p:cNvPr id="30" name="Text 28"/>
+          <p:cNvPr id="32" name="Text 29"/>
           <p:cNvSpPr txBox="1"/>
           <p:nvPr/>
         </p:nvSpPr>
@@ -11150,9 +11822,72 @@
           <a:chExt cx="0" cy="0"/>
         </a:xfrm>
       </p:grpSpPr>
-      <p:sp>
-        <p:nvSpPr>
-          <p:cNvPr id="2" name="Shape 0"/>
+      <p:pic>
+        <p:nvPicPr>
+          <p:cNvPr id="2" name="Image 0" descr="/sessions/compassionate-sweet-heisenberg/mnt/dev-aspath-life-main/tools/assets/logo-deck.png">    </p:cNvPr>
+          <p:cNvPicPr>
+            <a:picLocks noChangeAspect="1"/>
+          </p:cNvPicPr>
+          <p:nvPr/>
+        </p:nvPicPr>
+        <p:blipFill>
+          <a:blip r:embed="rId1"/>
+          <a:stretch>
+            <a:fillRect/>
+          </a:stretch>
+        </p:blipFill>
+        <p:spPr>
+          <a:xfrm>
+            <a:off x="11458173" y="109728"/>
+            <a:ext cx="209571" cy="256032"/>
+          </a:xfrm>
+          <a:prstGeom prst="rect">
+            <a:avLst/>
+          </a:prstGeom>
+        </p:spPr>
+      </p:pic>
+      <p:sp>
+        <p:nvSpPr>
+          <p:cNvPr id="3" name="Text 0"/>
+          <p:cNvSpPr txBox="1"/>
+          <p:nvPr/>
+        </p:nvSpPr>
+        <p:spPr>
+          <a:xfrm>
+            <a:off x="8623533" y="128016"/>
+            <a:ext cx="2743200" cy="237744"/>
+          </a:xfrm>
+          <a:prstGeom prst="rect">
+            <a:avLst/>
+          </a:prstGeom>
+          <a:noFill/>
+          <a:ln/>
+        </p:spPr>
+        <p:txBody>
+          <a:bodyPr wrap="square" lIns="0" tIns="0" rIns="0" bIns="0" rtlCol="0" anchor="ctr"/>
+          <a:lstStyle/>
+          <a:p>
+            <a:pPr algn="r" indent="0" marL="0">
+              <a:buNone/>
+            </a:pPr>
+            <a:r>
+              <a:rPr lang="en-US" sz="750" dirty="0">
+                <a:solidFill>
+                  <a:srgbClr val="97A9AF"/>
+                </a:solidFill>
+                <a:latin typeface="Meiryo" pitchFamily="34" charset="0"/>
+                <a:ea typeface="Meiryo" pitchFamily="34" charset="-122"/>
+                <a:cs typeface="Meiryo" pitchFamily="34" charset="-120"/>
+              </a:rPr>
+              <a:t>鹿児島のパーキンソン病専門トレーニングスタジオ</a:t>
+            </a:r>
+            <a:endParaRPr lang="en-US" sz="750" dirty="0"/>
+          </a:p>
+        </p:txBody>
+      </p:sp>
+      <p:sp>
+        <p:nvSpPr>
+          <p:cNvPr id="4" name="Shape 1"/>
           <p:cNvSpPr/>
           <p:nvPr/>
         </p:nvSpPr>
@@ -11174,7 +11909,7 @@
       </p:sp>
       <p:sp>
         <p:nvSpPr>
-          <p:cNvPr id="3" name="Text 1"/>
+          <p:cNvPr id="5" name="Text 2"/>
           <p:cNvSpPr txBox="1"/>
           <p:nvPr/>
         </p:nvSpPr>
@@ -11213,7 +11948,7 @@
       </p:sp>
       <p:sp>
         <p:nvSpPr>
-          <p:cNvPr id="4" name="Text 2"/>
+          <p:cNvPr id="6" name="Text 3"/>
           <p:cNvSpPr txBox="1"/>
           <p:nvPr/>
         </p:nvSpPr>
@@ -11252,7 +11987,7 @@
       </p:sp>
       <p:sp>
         <p:nvSpPr>
-          <p:cNvPr id="5" name="Text 3"/>
+          <p:cNvPr id="7" name="Text 4"/>
           <p:cNvSpPr txBox="1"/>
           <p:nvPr/>
         </p:nvSpPr>
@@ -11291,7 +12026,7 @@
       </p:sp>
       <p:sp>
         <p:nvSpPr>
-          <p:cNvPr id="6" name="Text 4"/>
+          <p:cNvPr id="8" name="Text 5"/>
           <p:cNvSpPr txBox="1"/>
           <p:nvPr/>
         </p:nvSpPr>
@@ -11330,7 +12065,7 @@
       </p:sp>
       <p:sp>
         <p:nvSpPr>
-          <p:cNvPr id="7" name="Shape 5"/>
+          <p:cNvPr id="9" name="Shape 6"/>
           <p:cNvSpPr/>
           <p:nvPr/>
         </p:nvSpPr>
@@ -11350,7 +12085,7 @@
       </p:sp>
       <p:sp>
         <p:nvSpPr>
-          <p:cNvPr id="8" name="Text 6"/>
+          <p:cNvPr id="10" name="Text 7"/>
           <p:cNvSpPr txBox="1"/>
           <p:nvPr/>
         </p:nvSpPr>
@@ -11389,7 +12124,7 @@
       </p:sp>
       <p:sp>
         <p:nvSpPr>
-          <p:cNvPr id="9" name="Text 7"/>
+          <p:cNvPr id="11" name="Text 8"/>
           <p:cNvSpPr txBox="1"/>
           <p:nvPr/>
         </p:nvSpPr>
@@ -11434,7 +12169,7 @@
       </p:sp>
       <p:sp>
         <p:nvSpPr>
-          <p:cNvPr id="10" name="Shape 8"/>
+          <p:cNvPr id="12" name="Shape 9"/>
           <p:cNvSpPr/>
           <p:nvPr/>
         </p:nvSpPr>
@@ -11454,7 +12189,7 @@
       </p:sp>
       <p:sp>
         <p:nvSpPr>
-          <p:cNvPr id="11" name="Text 9"/>
+          <p:cNvPr id="13" name="Text 10"/>
           <p:cNvSpPr txBox="1"/>
           <p:nvPr/>
         </p:nvSpPr>
@@ -11493,7 +12228,7 @@
       </p:sp>
       <p:sp>
         <p:nvSpPr>
-          <p:cNvPr id="12" name="Text 10"/>
+          <p:cNvPr id="14" name="Text 11"/>
           <p:cNvSpPr txBox="1"/>
           <p:nvPr/>
         </p:nvSpPr>
@@ -11549,7 +12284,7 @@
       </p:sp>
       <p:sp>
         <p:nvSpPr>
-          <p:cNvPr id="13" name="Shape 11"/>
+          <p:cNvPr id="15" name="Shape 12"/>
           <p:cNvSpPr/>
           <p:nvPr/>
         </p:nvSpPr>
@@ -11569,7 +12304,7 @@
       </p:sp>
       <p:sp>
         <p:nvSpPr>
-          <p:cNvPr id="14" name="Text 12"/>
+          <p:cNvPr id="16" name="Text 13"/>
           <p:cNvSpPr txBox="1"/>
           <p:nvPr/>
         </p:nvSpPr>
@@ -11608,7 +12343,7 @@
       </p:sp>
       <p:sp>
         <p:nvSpPr>
-          <p:cNvPr id="15" name="Text 13"/>
+          <p:cNvPr id="17" name="Text 14"/>
           <p:cNvSpPr txBox="1"/>
           <p:nvPr/>
         </p:nvSpPr>
@@ -11664,7 +12399,7 @@
       </p:sp>
       <p:sp>
         <p:nvSpPr>
-          <p:cNvPr id="16" name="Shape 14"/>
+          <p:cNvPr id="18" name="Shape 15"/>
           <p:cNvSpPr/>
           <p:nvPr/>
         </p:nvSpPr>
@@ -11684,7 +12419,7 @@
       </p:sp>
       <p:sp>
         <p:nvSpPr>
-          <p:cNvPr id="17" name="Text 15"/>
+          <p:cNvPr id="19" name="Text 16"/>
           <p:cNvSpPr txBox="1"/>
           <p:nvPr/>
         </p:nvSpPr>
@@ -11723,7 +12458,7 @@
       </p:sp>
       <p:sp>
         <p:nvSpPr>
-          <p:cNvPr id="18" name="Text 16"/>
+          <p:cNvPr id="20" name="Text 17"/>
           <p:cNvSpPr txBox="1"/>
           <p:nvPr/>
         </p:nvSpPr>
@@ -11768,7 +12503,7 @@
       </p:sp>
       <p:sp>
         <p:nvSpPr>
-          <p:cNvPr id="19" name="Shape 17"/>
+          <p:cNvPr id="21" name="Shape 18"/>
           <p:cNvSpPr/>
           <p:nvPr/>
         </p:nvSpPr>
@@ -11795,7 +12530,7 @@
       </p:sp>
       <p:sp>
         <p:nvSpPr>
-          <p:cNvPr id="20" name="Shape 18"/>
+          <p:cNvPr id="22" name="Shape 19"/>
           <p:cNvSpPr/>
           <p:nvPr/>
         </p:nvSpPr>
@@ -11815,7 +12550,7 @@
       </p:sp>
       <p:sp>
         <p:nvSpPr>
-          <p:cNvPr id="21" name="Text 19"/>
+          <p:cNvPr id="23" name="Text 20"/>
           <p:cNvSpPr txBox="1"/>
           <p:nvPr/>
         </p:nvSpPr>
@@ -11854,7 +12589,7 @@
       </p:sp>
       <p:sp>
         <p:nvSpPr>
-          <p:cNvPr id="22" name="Text 20"/>
+          <p:cNvPr id="24" name="Text 21"/>
           <p:cNvSpPr txBox="1"/>
           <p:nvPr/>
         </p:nvSpPr>
@@ -11916,7 +12651,7 @@
       </p:sp>
       <p:sp>
         <p:nvSpPr>
-          <p:cNvPr id="23" name="Shape 21"/>
+          <p:cNvPr id="25" name="Shape 22"/>
           <p:cNvSpPr/>
           <p:nvPr/>
         </p:nvSpPr>
@@ -11943,7 +12678,7 @@
       </p:sp>
       <p:sp>
         <p:nvSpPr>
-          <p:cNvPr id="24" name="Shape 22"/>
+          <p:cNvPr id="26" name="Shape 23"/>
           <p:cNvSpPr/>
           <p:nvPr/>
         </p:nvSpPr>
@@ -11963,7 +12698,7 @@
       </p:sp>
       <p:sp>
         <p:nvSpPr>
-          <p:cNvPr id="25" name="Text 23"/>
+          <p:cNvPr id="27" name="Text 24"/>
           <p:cNvSpPr txBox="1"/>
           <p:nvPr/>
         </p:nvSpPr>
@@ -12002,7 +12737,7 @@
       </p:sp>
       <p:sp>
         <p:nvSpPr>
-          <p:cNvPr id="26" name="Text 24"/>
+          <p:cNvPr id="28" name="Text 25"/>
           <p:cNvSpPr txBox="1"/>
           <p:nvPr/>
         </p:nvSpPr>
@@ -12064,7 +12799,7 @@
       </p:sp>
       <p:sp>
         <p:nvSpPr>
-          <p:cNvPr id="27" name="Shape 25"/>
+          <p:cNvPr id="29" name="Shape 26"/>
           <p:cNvSpPr/>
           <p:nvPr/>
         </p:nvSpPr>
@@ -12091,7 +12826,7 @@
       </p:sp>
       <p:sp>
         <p:nvSpPr>
-          <p:cNvPr id="28" name="Shape 26"/>
+          <p:cNvPr id="30" name="Shape 27"/>
           <p:cNvSpPr/>
           <p:nvPr/>
         </p:nvSpPr>
@@ -12111,7 +12846,7 @@
       </p:sp>
       <p:sp>
         <p:nvSpPr>
-          <p:cNvPr id="29" name="Text 27"/>
+          <p:cNvPr id="31" name="Text 28"/>
           <p:cNvSpPr txBox="1"/>
           <p:nvPr/>
         </p:nvSpPr>
@@ -12150,7 +12885,7 @@
       </p:sp>
       <p:sp>
         <p:nvSpPr>
-          <p:cNvPr id="30" name="Text 28"/>
+          <p:cNvPr id="32" name="Text 29"/>
           <p:cNvSpPr txBox="1"/>
           <p:nvPr/>
         </p:nvSpPr>
@@ -12242,187 +12977,9 @@
           <a:chExt cx="0" cy="0"/>
         </a:xfrm>
       </p:grpSpPr>
-      <p:sp>
-        <p:nvSpPr>
-          <p:cNvPr id="2" name="Shape 0"/>
-          <p:cNvSpPr/>
-          <p:nvPr/>
-        </p:nvSpPr>
-        <p:spPr>
-          <a:xfrm>
-            <a:off x="548640" y="329184"/>
-            <a:ext cx="475488" cy="475488"/>
-          </a:xfrm>
-          <a:prstGeom prst="roundRect">
-            <a:avLst>
-              <a:gd name="adj" fmla="val 50000"/>
-            </a:avLst>
-          </a:prstGeom>
-          <a:solidFill>
-            <a:srgbClr val="F4A261"/>
-          </a:solidFill>
-          <a:ln/>
-        </p:spPr>
-      </p:sp>
-      <p:sp>
-        <p:nvSpPr>
-          <p:cNvPr id="3" name="Text 1"/>
-          <p:cNvSpPr txBox="1"/>
-          <p:nvPr/>
-        </p:nvSpPr>
-        <p:spPr>
-          <a:xfrm>
-            <a:off x="548640" y="329184"/>
-            <a:ext cx="475488" cy="475488"/>
-          </a:xfrm>
-          <a:prstGeom prst="rect">
-            <a:avLst/>
-          </a:prstGeom>
-          <a:noFill/>
-          <a:ln/>
-        </p:spPr>
-        <p:txBody>
-          <a:bodyPr wrap="square" lIns="0" tIns="0" rIns="0" bIns="0" rtlCol="0" anchor="ctr"/>
-          <a:lstStyle/>
-          <a:p>
-            <a:pPr algn="ctr" indent="0" marL="0">
-              <a:buNone/>
-            </a:pPr>
-            <a:r>
-              <a:rPr lang="en-US" sz="2000" b="1" dirty="0">
-                <a:solidFill>
-                  <a:srgbClr val="FFFFFF"/>
-                </a:solidFill>
-                <a:latin typeface="Meiryo" pitchFamily="34" charset="0"/>
-                <a:ea typeface="Meiryo" pitchFamily="34" charset="-122"/>
-                <a:cs typeface="Meiryo" pitchFamily="34" charset="-120"/>
-              </a:rPr>
-              <a:t>A</a:t>
-            </a:r>
-            <a:endParaRPr lang="en-US" sz="2000" dirty="0"/>
-          </a:p>
-        </p:txBody>
-      </p:sp>
-      <p:sp>
-        <p:nvSpPr>
-          <p:cNvPr id="4" name="Text 2"/>
-          <p:cNvSpPr txBox="1"/>
-          <p:nvPr/>
-        </p:nvSpPr>
-        <p:spPr>
-          <a:xfrm>
-            <a:off x="1207008" y="292608"/>
-            <a:ext cx="10332720" cy="603504"/>
-          </a:xfrm>
-          <a:prstGeom prst="rect">
-            <a:avLst/>
-          </a:prstGeom>
-          <a:noFill/>
-          <a:ln/>
-        </p:spPr>
-        <p:txBody>
-          <a:bodyPr wrap="square" lIns="0" tIns="0" rIns="0" bIns="0" rtlCol="0" anchor="ctr"/>
-          <a:lstStyle/>
-          <a:p>
-            <a:pPr indent="0" marL="0">
-              <a:buNone/>
-            </a:pPr>
-            <a:r>
-              <a:rPr lang="en-US" sz="2800" b="1" dirty="0">
-                <a:solidFill>
-                  <a:srgbClr val="264653"/>
-                </a:solidFill>
-                <a:latin typeface="Meiryo" pitchFamily="34" charset="0"/>
-                <a:ea typeface="Meiryo" pitchFamily="34" charset="-122"/>
-                <a:cs typeface="Meiryo" pitchFamily="34" charset="-120"/>
-              </a:rPr>
-              <a:t>テーマを入れ替える</a:t>
-            </a:r>
-            <a:endParaRPr lang="en-US" sz="2800" dirty="0"/>
-          </a:p>
-        </p:txBody>
-      </p:sp>
-      <p:sp>
-        <p:nvSpPr>
-          <p:cNvPr id="5" name="Text 3"/>
-          <p:cNvSpPr txBox="1"/>
-          <p:nvPr/>
-        </p:nvSpPr>
-        <p:spPr>
-          <a:xfrm>
-            <a:off x="1225296" y="914400"/>
-            <a:ext cx="10332720" cy="329184"/>
-          </a:xfrm>
-          <a:prstGeom prst="rect">
-            <a:avLst/>
-          </a:prstGeom>
-          <a:noFill/>
-          <a:ln/>
-        </p:spPr>
-        <p:txBody>
-          <a:bodyPr wrap="square" lIns="0" tIns="0" rIns="0" bIns="0" rtlCol="0" anchor="ctr"/>
-          <a:lstStyle/>
-          <a:p>
-            <a:pPr indent="0" marL="0">
-              <a:buNone/>
-            </a:pPr>
-            <a:r>
-              <a:rPr lang="en-US" sz="1400" dirty="0">
-                <a:solidFill>
-                  <a:srgbClr val="52707A"/>
-                </a:solidFill>
-                <a:latin typeface="Meiryo" pitchFamily="34" charset="0"/>
-                <a:ea typeface="Meiryo" pitchFamily="34" charset="-122"/>
-                <a:cs typeface="Meiryo" pitchFamily="34" charset="-120"/>
-              </a:rPr>
-              <a:t>サイトの見た目や固定ページを直したときの反映作業</a:t>
-            </a:r>
-            <a:endParaRPr lang="en-US" sz="1400" dirty="0"/>
-          </a:p>
-        </p:txBody>
-      </p:sp>
-      <p:sp>
-        <p:nvSpPr>
-          <p:cNvPr id="6" name="Text 4"/>
-          <p:cNvSpPr txBox="1"/>
-          <p:nvPr/>
-        </p:nvSpPr>
-        <p:spPr>
-          <a:xfrm>
-            <a:off x="11384280" y="6355080"/>
-            <a:ext cx="411480" cy="256032"/>
-          </a:xfrm>
-          <a:prstGeom prst="rect">
-            <a:avLst/>
-          </a:prstGeom>
-          <a:noFill/>
-          <a:ln/>
-        </p:spPr>
-        <p:txBody>
-          <a:bodyPr wrap="square" lIns="0" tIns="0" rIns="0" bIns="0" rtlCol="0" anchor="ctr"/>
-          <a:lstStyle/>
-          <a:p>
-            <a:pPr algn="r" indent="0" marL="0">
-              <a:buNone/>
-            </a:pPr>
-            <a:r>
-              <a:rPr lang="en-US" sz="1050" dirty="0">
-                <a:solidFill>
-                  <a:srgbClr val="A8B4B8"/>
-                </a:solidFill>
-                <a:latin typeface="Meiryo" pitchFamily="34" charset="0"/>
-                <a:ea typeface="Meiryo" pitchFamily="34" charset="-122"/>
-                <a:cs typeface="Meiryo" pitchFamily="34" charset="-120"/>
-              </a:rPr>
-              <a:t>5</a:t>
-            </a:r>
-            <a:endParaRPr lang="en-US" sz="1050" dirty="0"/>
-          </a:p>
-        </p:txBody>
-      </p:sp>
       <p:pic>
         <p:nvPicPr>
-          <p:cNvPr id="7" name="Image 0" descr="/sessions/compassionate-sweet-heisenberg/mnt/dev-aspath-life-main/_wp移行素材/★引継ぎ資料/画像/05_テーマのアップロード.jpg">    </p:cNvPr>
+          <p:cNvPr id="2" name="Image 0" descr="/sessions/compassionate-sweet-heisenberg/mnt/dev-aspath-life-main/tools/assets/logo-deck.png">    </p:cNvPr>
           <p:cNvPicPr>
             <a:picLocks noChangeAspect="1"/>
           </p:cNvPicPr>
@@ -12436,6 +12993,247 @@
         </p:blipFill>
         <p:spPr>
           <a:xfrm>
+            <a:off x="11458173" y="109728"/>
+            <a:ext cx="209571" cy="256032"/>
+          </a:xfrm>
+          <a:prstGeom prst="rect">
+            <a:avLst/>
+          </a:prstGeom>
+        </p:spPr>
+      </p:pic>
+      <p:sp>
+        <p:nvSpPr>
+          <p:cNvPr id="3" name="Text 0"/>
+          <p:cNvSpPr txBox="1"/>
+          <p:nvPr/>
+        </p:nvSpPr>
+        <p:spPr>
+          <a:xfrm>
+            <a:off x="8623533" y="128016"/>
+            <a:ext cx="2743200" cy="237744"/>
+          </a:xfrm>
+          <a:prstGeom prst="rect">
+            <a:avLst/>
+          </a:prstGeom>
+          <a:noFill/>
+          <a:ln/>
+        </p:spPr>
+        <p:txBody>
+          <a:bodyPr wrap="square" lIns="0" tIns="0" rIns="0" bIns="0" rtlCol="0" anchor="ctr"/>
+          <a:lstStyle/>
+          <a:p>
+            <a:pPr algn="r" indent="0" marL="0">
+              <a:buNone/>
+            </a:pPr>
+            <a:r>
+              <a:rPr lang="en-US" sz="750" dirty="0">
+                <a:solidFill>
+                  <a:srgbClr val="97A9AF"/>
+                </a:solidFill>
+                <a:latin typeface="Meiryo" pitchFamily="34" charset="0"/>
+                <a:ea typeface="Meiryo" pitchFamily="34" charset="-122"/>
+                <a:cs typeface="Meiryo" pitchFamily="34" charset="-120"/>
+              </a:rPr>
+              <a:t>鹿児島のパーキンソン病専門トレーニングスタジオ</a:t>
+            </a:r>
+            <a:endParaRPr lang="en-US" sz="750" dirty="0"/>
+          </a:p>
+        </p:txBody>
+      </p:sp>
+      <p:sp>
+        <p:nvSpPr>
+          <p:cNvPr id="4" name="Shape 1"/>
+          <p:cNvSpPr/>
+          <p:nvPr/>
+        </p:nvSpPr>
+        <p:spPr>
+          <a:xfrm>
+            <a:off x="548640" y="329184"/>
+            <a:ext cx="475488" cy="475488"/>
+          </a:xfrm>
+          <a:prstGeom prst="roundRect">
+            <a:avLst>
+              <a:gd name="adj" fmla="val 50000"/>
+            </a:avLst>
+          </a:prstGeom>
+          <a:solidFill>
+            <a:srgbClr val="F4A261"/>
+          </a:solidFill>
+          <a:ln/>
+        </p:spPr>
+      </p:sp>
+      <p:sp>
+        <p:nvSpPr>
+          <p:cNvPr id="5" name="Text 2"/>
+          <p:cNvSpPr txBox="1"/>
+          <p:nvPr/>
+        </p:nvSpPr>
+        <p:spPr>
+          <a:xfrm>
+            <a:off x="548640" y="329184"/>
+            <a:ext cx="475488" cy="475488"/>
+          </a:xfrm>
+          <a:prstGeom prst="rect">
+            <a:avLst/>
+          </a:prstGeom>
+          <a:noFill/>
+          <a:ln/>
+        </p:spPr>
+        <p:txBody>
+          <a:bodyPr wrap="square" lIns="0" tIns="0" rIns="0" bIns="0" rtlCol="0" anchor="ctr"/>
+          <a:lstStyle/>
+          <a:p>
+            <a:pPr algn="ctr" indent="0" marL="0">
+              <a:buNone/>
+            </a:pPr>
+            <a:r>
+              <a:rPr lang="en-US" sz="2000" b="1" dirty="0">
+                <a:solidFill>
+                  <a:srgbClr val="FFFFFF"/>
+                </a:solidFill>
+                <a:latin typeface="Meiryo" pitchFamily="34" charset="0"/>
+                <a:ea typeface="Meiryo" pitchFamily="34" charset="-122"/>
+                <a:cs typeface="Meiryo" pitchFamily="34" charset="-120"/>
+              </a:rPr>
+              <a:t>A</a:t>
+            </a:r>
+            <a:endParaRPr lang="en-US" sz="2000" dirty="0"/>
+          </a:p>
+        </p:txBody>
+      </p:sp>
+      <p:sp>
+        <p:nvSpPr>
+          <p:cNvPr id="6" name="Text 3"/>
+          <p:cNvSpPr txBox="1"/>
+          <p:nvPr/>
+        </p:nvSpPr>
+        <p:spPr>
+          <a:xfrm>
+            <a:off x="1207008" y="292608"/>
+            <a:ext cx="10332720" cy="603504"/>
+          </a:xfrm>
+          <a:prstGeom prst="rect">
+            <a:avLst/>
+          </a:prstGeom>
+          <a:noFill/>
+          <a:ln/>
+        </p:spPr>
+        <p:txBody>
+          <a:bodyPr wrap="square" lIns="0" tIns="0" rIns="0" bIns="0" rtlCol="0" anchor="ctr"/>
+          <a:lstStyle/>
+          <a:p>
+            <a:pPr indent="0" marL="0">
+              <a:buNone/>
+            </a:pPr>
+            <a:r>
+              <a:rPr lang="en-US" sz="2800" b="1" dirty="0">
+                <a:solidFill>
+                  <a:srgbClr val="264653"/>
+                </a:solidFill>
+                <a:latin typeface="Meiryo" pitchFamily="34" charset="0"/>
+                <a:ea typeface="Meiryo" pitchFamily="34" charset="-122"/>
+                <a:cs typeface="Meiryo" pitchFamily="34" charset="-120"/>
+              </a:rPr>
+              <a:t>テーマを入れ替える</a:t>
+            </a:r>
+            <a:endParaRPr lang="en-US" sz="2800" dirty="0"/>
+          </a:p>
+        </p:txBody>
+      </p:sp>
+      <p:sp>
+        <p:nvSpPr>
+          <p:cNvPr id="7" name="Text 4"/>
+          <p:cNvSpPr txBox="1"/>
+          <p:nvPr/>
+        </p:nvSpPr>
+        <p:spPr>
+          <a:xfrm>
+            <a:off x="1225296" y="914400"/>
+            <a:ext cx="10332720" cy="329184"/>
+          </a:xfrm>
+          <a:prstGeom prst="rect">
+            <a:avLst/>
+          </a:prstGeom>
+          <a:noFill/>
+          <a:ln/>
+        </p:spPr>
+        <p:txBody>
+          <a:bodyPr wrap="square" lIns="0" tIns="0" rIns="0" bIns="0" rtlCol="0" anchor="ctr"/>
+          <a:lstStyle/>
+          <a:p>
+            <a:pPr indent="0" marL="0">
+              <a:buNone/>
+            </a:pPr>
+            <a:r>
+              <a:rPr lang="en-US" sz="1400" dirty="0">
+                <a:solidFill>
+                  <a:srgbClr val="52707A"/>
+                </a:solidFill>
+                <a:latin typeface="Meiryo" pitchFamily="34" charset="0"/>
+                <a:ea typeface="Meiryo" pitchFamily="34" charset="-122"/>
+                <a:cs typeface="Meiryo" pitchFamily="34" charset="-120"/>
+              </a:rPr>
+              <a:t>サイトの見た目や固定ページを直したときの反映作業</a:t>
+            </a:r>
+            <a:endParaRPr lang="en-US" sz="1400" dirty="0"/>
+          </a:p>
+        </p:txBody>
+      </p:sp>
+      <p:sp>
+        <p:nvSpPr>
+          <p:cNvPr id="8" name="Text 5"/>
+          <p:cNvSpPr txBox="1"/>
+          <p:nvPr/>
+        </p:nvSpPr>
+        <p:spPr>
+          <a:xfrm>
+            <a:off x="11384280" y="6355080"/>
+            <a:ext cx="411480" cy="256032"/>
+          </a:xfrm>
+          <a:prstGeom prst="rect">
+            <a:avLst/>
+          </a:prstGeom>
+          <a:noFill/>
+          <a:ln/>
+        </p:spPr>
+        <p:txBody>
+          <a:bodyPr wrap="square" lIns="0" tIns="0" rIns="0" bIns="0" rtlCol="0" anchor="ctr"/>
+          <a:lstStyle/>
+          <a:p>
+            <a:pPr algn="r" indent="0" marL="0">
+              <a:buNone/>
+            </a:pPr>
+            <a:r>
+              <a:rPr lang="en-US" sz="1050" dirty="0">
+                <a:solidFill>
+                  <a:srgbClr val="A8B4B8"/>
+                </a:solidFill>
+                <a:latin typeface="Meiryo" pitchFamily="34" charset="0"/>
+                <a:ea typeface="Meiryo" pitchFamily="34" charset="-122"/>
+                <a:cs typeface="Meiryo" pitchFamily="34" charset="-120"/>
+              </a:rPr>
+              <a:t>5</a:t>
+            </a:r>
+            <a:endParaRPr lang="en-US" sz="1050" dirty="0"/>
+          </a:p>
+        </p:txBody>
+      </p:sp>
+      <p:pic>
+        <p:nvPicPr>
+          <p:cNvPr id="9" name="Image 1" descr="/sessions/compassionate-sweet-heisenberg/mnt/dev-aspath-life-main/_wp移行素材/★引継ぎ資料/画像/05_テーマのアップロード.jpg">    </p:cNvPr>
+          <p:cNvPicPr>
+            <a:picLocks noChangeAspect="1"/>
+          </p:cNvPicPr>
+          <p:nvPr/>
+        </p:nvPicPr>
+        <p:blipFill>
+          <a:blip r:embed="rId2"/>
+          <a:stretch>
+            <a:fillRect/>
+          </a:stretch>
+        </p:blipFill>
+        <p:spPr>
+          <a:xfrm>
             <a:off x="594360" y="1463040"/>
             <a:ext cx="6675120" cy="3252418"/>
           </a:xfrm>
@@ -12446,7 +13244,7 @@
       </p:pic>
       <p:sp>
         <p:nvSpPr>
-          <p:cNvPr id="8" name="Shape 5"/>
+          <p:cNvPr id="10" name="Shape 6"/>
           <p:cNvSpPr/>
           <p:nvPr/>
         </p:nvSpPr>
@@ -12473,7 +13271,7 @@
       </p:sp>
       <p:sp>
         <p:nvSpPr>
-          <p:cNvPr id="9" name="Shape 6"/>
+          <p:cNvPr id="11" name="Shape 7"/>
           <p:cNvSpPr/>
           <p:nvPr/>
         </p:nvSpPr>
@@ -12493,7 +13291,7 @@
       </p:sp>
       <p:sp>
         <p:nvSpPr>
-          <p:cNvPr id="10" name="Text 7"/>
+          <p:cNvPr id="12" name="Text 8"/>
           <p:cNvSpPr txBox="1"/>
           <p:nvPr/>
         </p:nvSpPr>
@@ -12532,7 +13330,7 @@
       </p:sp>
       <p:sp>
         <p:nvSpPr>
-          <p:cNvPr id="11" name="Text 8"/>
+          <p:cNvPr id="13" name="Text 9"/>
           <p:cNvSpPr txBox="1"/>
           <p:nvPr/>
         </p:nvSpPr>
@@ -12577,7 +13375,7 @@
       </p:sp>
       <p:sp>
         <p:nvSpPr>
-          <p:cNvPr id="12" name="Shape 9"/>
+          <p:cNvPr id="14" name="Shape 10"/>
           <p:cNvSpPr/>
           <p:nvPr/>
         </p:nvSpPr>
@@ -12597,7 +13395,7 @@
       </p:sp>
       <p:sp>
         <p:nvSpPr>
-          <p:cNvPr id="13" name="Text 10"/>
+          <p:cNvPr id="15" name="Text 11"/>
           <p:cNvSpPr txBox="1"/>
           <p:nvPr/>
         </p:nvSpPr>
@@ -12636,7 +13434,7 @@
       </p:sp>
       <p:sp>
         <p:nvSpPr>
-          <p:cNvPr id="14" name="Text 11"/>
+          <p:cNvPr id="16" name="Text 12"/>
           <p:cNvSpPr txBox="1"/>
           <p:nvPr/>
         </p:nvSpPr>
@@ -12692,7 +13490,7 @@
       </p:sp>
       <p:sp>
         <p:nvSpPr>
-          <p:cNvPr id="15" name="Shape 12"/>
+          <p:cNvPr id="17" name="Shape 13"/>
           <p:cNvSpPr/>
           <p:nvPr/>
         </p:nvSpPr>
@@ -12712,7 +13510,7 @@
       </p:sp>
       <p:sp>
         <p:nvSpPr>
-          <p:cNvPr id="16" name="Text 13"/>
+          <p:cNvPr id="18" name="Text 14"/>
           <p:cNvSpPr txBox="1"/>
           <p:nvPr/>
         </p:nvSpPr>
@@ -12751,7 +13549,7 @@
       </p:sp>
       <p:sp>
         <p:nvSpPr>
-          <p:cNvPr id="17" name="Text 14"/>
+          <p:cNvPr id="19" name="Text 15"/>
           <p:cNvSpPr txBox="1"/>
           <p:nvPr/>
         </p:nvSpPr>
@@ -12807,7 +13605,7 @@
       </p:sp>
       <p:sp>
         <p:nvSpPr>
-          <p:cNvPr id="18" name="Shape 15"/>
+          <p:cNvPr id="20" name="Shape 16"/>
           <p:cNvSpPr/>
           <p:nvPr/>
         </p:nvSpPr>
@@ -12827,7 +13625,7 @@
       </p:sp>
       <p:sp>
         <p:nvSpPr>
-          <p:cNvPr id="19" name="Text 16"/>
+          <p:cNvPr id="21" name="Text 17"/>
           <p:cNvSpPr txBox="1"/>
           <p:nvPr/>
         </p:nvSpPr>
@@ -12866,7 +13664,7 @@
       </p:sp>
       <p:sp>
         <p:nvSpPr>
-          <p:cNvPr id="20" name="Text 17"/>
+          <p:cNvPr id="22" name="Text 18"/>
           <p:cNvSpPr txBox="1"/>
           <p:nvPr/>
         </p:nvSpPr>
@@ -12922,7 +13720,7 @@
       </p:sp>
       <p:sp>
         <p:nvSpPr>
-          <p:cNvPr id="21" name="Shape 18"/>
+          <p:cNvPr id="23" name="Shape 19"/>
           <p:cNvSpPr/>
           <p:nvPr/>
         </p:nvSpPr>
@@ -12942,7 +13740,7 @@
       </p:sp>
       <p:sp>
         <p:nvSpPr>
-          <p:cNvPr id="22" name="Text 19"/>
+          <p:cNvPr id="24" name="Text 20"/>
           <p:cNvSpPr txBox="1"/>
           <p:nvPr/>
         </p:nvSpPr>
@@ -12981,7 +13779,7 @@
       </p:sp>
       <p:sp>
         <p:nvSpPr>
-          <p:cNvPr id="23" name="Text 20"/>
+          <p:cNvPr id="25" name="Text 21"/>
           <p:cNvSpPr txBox="1"/>
           <p:nvPr/>
         </p:nvSpPr>
@@ -13037,7 +13835,7 @@
       </p:sp>
       <p:sp>
         <p:nvSpPr>
-          <p:cNvPr id="24" name="Shape 21"/>
+          <p:cNvPr id="26" name="Shape 22"/>
           <p:cNvSpPr/>
           <p:nvPr/>
         </p:nvSpPr>
@@ -13064,7 +13862,7 @@
       </p:sp>
       <p:sp>
         <p:nvSpPr>
-          <p:cNvPr id="25" name="Shape 22"/>
+          <p:cNvPr id="27" name="Shape 23"/>
           <p:cNvSpPr/>
           <p:nvPr/>
         </p:nvSpPr>
@@ -13084,7 +13882,7 @@
       </p:sp>
       <p:sp>
         <p:nvSpPr>
-          <p:cNvPr id="26" name="Text 23"/>
+          <p:cNvPr id="28" name="Text 24"/>
           <p:cNvSpPr txBox="1"/>
           <p:nvPr/>
         </p:nvSpPr>
@@ -13123,7 +13921,7 @@
       </p:sp>
       <p:sp>
         <p:nvSpPr>
-          <p:cNvPr id="27" name="Text 24"/>
+          <p:cNvPr id="29" name="Text 25"/>
           <p:cNvSpPr txBox="1"/>
           <p:nvPr/>
         </p:nvSpPr>
@@ -13215,9 +14013,72 @@
           <a:chExt cx="0" cy="0"/>
         </a:xfrm>
       </p:grpSpPr>
-      <p:sp>
-        <p:nvSpPr>
-          <p:cNvPr id="2" name="Shape 0"/>
+      <p:pic>
+        <p:nvPicPr>
+          <p:cNvPr id="2" name="Image 0" descr="/sessions/compassionate-sweet-heisenberg/mnt/dev-aspath-life-main/tools/assets/logo-deck.png">    </p:cNvPr>
+          <p:cNvPicPr>
+            <a:picLocks noChangeAspect="1"/>
+          </p:cNvPicPr>
+          <p:nvPr/>
+        </p:nvPicPr>
+        <p:blipFill>
+          <a:blip r:embed="rId1"/>
+          <a:stretch>
+            <a:fillRect/>
+          </a:stretch>
+        </p:blipFill>
+        <p:spPr>
+          <a:xfrm>
+            <a:off x="11458173" y="109728"/>
+            <a:ext cx="209571" cy="256032"/>
+          </a:xfrm>
+          <a:prstGeom prst="rect">
+            <a:avLst/>
+          </a:prstGeom>
+        </p:spPr>
+      </p:pic>
+      <p:sp>
+        <p:nvSpPr>
+          <p:cNvPr id="3" name="Text 0"/>
+          <p:cNvSpPr txBox="1"/>
+          <p:nvPr/>
+        </p:nvSpPr>
+        <p:spPr>
+          <a:xfrm>
+            <a:off x="8623533" y="128016"/>
+            <a:ext cx="2743200" cy="237744"/>
+          </a:xfrm>
+          <a:prstGeom prst="rect">
+            <a:avLst/>
+          </a:prstGeom>
+          <a:noFill/>
+          <a:ln/>
+        </p:spPr>
+        <p:txBody>
+          <a:bodyPr wrap="square" lIns="0" tIns="0" rIns="0" bIns="0" rtlCol="0" anchor="ctr"/>
+          <a:lstStyle/>
+          <a:p>
+            <a:pPr algn="r" indent="0" marL="0">
+              <a:buNone/>
+            </a:pPr>
+            <a:r>
+              <a:rPr lang="en-US" sz="750" dirty="0">
+                <a:solidFill>
+                  <a:srgbClr val="97A9AF"/>
+                </a:solidFill>
+                <a:latin typeface="Meiryo" pitchFamily="34" charset="0"/>
+                <a:ea typeface="Meiryo" pitchFamily="34" charset="-122"/>
+                <a:cs typeface="Meiryo" pitchFamily="34" charset="-120"/>
+              </a:rPr>
+              <a:t>鹿児島のパーキンソン病専門トレーニングスタジオ</a:t>
+            </a:r>
+            <a:endParaRPr lang="en-US" sz="750" dirty="0"/>
+          </a:p>
+        </p:txBody>
+      </p:sp>
+      <p:sp>
+        <p:nvSpPr>
+          <p:cNvPr id="4" name="Shape 1"/>
           <p:cNvSpPr/>
           <p:nvPr/>
         </p:nvSpPr>
@@ -13239,7 +14100,7 @@
       </p:sp>
       <p:sp>
         <p:nvSpPr>
-          <p:cNvPr id="3" name="Text 1"/>
+          <p:cNvPr id="5" name="Text 2"/>
           <p:cNvSpPr txBox="1"/>
           <p:nvPr/>
         </p:nvSpPr>
@@ -13278,7 +14139,7 @@
       </p:sp>
       <p:sp>
         <p:nvSpPr>
-          <p:cNvPr id="4" name="Text 2"/>
+          <p:cNvPr id="6" name="Text 3"/>
           <p:cNvSpPr txBox="1"/>
           <p:nvPr/>
         </p:nvSpPr>
@@ -13317,7 +14178,7 @@
       </p:sp>
       <p:sp>
         <p:nvSpPr>
-          <p:cNvPr id="5" name="Text 3"/>
+          <p:cNvPr id="7" name="Text 4"/>
           <p:cNvSpPr txBox="1"/>
           <p:nvPr/>
         </p:nvSpPr>
@@ -13356,7 +14217,7 @@
       </p:sp>
       <p:sp>
         <p:nvSpPr>
-          <p:cNvPr id="6" name="Text 4"/>
+          <p:cNvPr id="8" name="Text 5"/>
           <p:cNvSpPr txBox="1"/>
           <p:nvPr/>
         </p:nvSpPr>
@@ -13395,7 +14256,7 @@
       </p:sp>
       <p:sp>
         <p:nvSpPr>
-          <p:cNvPr id="7" name="Shape 5"/>
+          <p:cNvPr id="9" name="Shape 6"/>
           <p:cNvSpPr/>
           <p:nvPr/>
         </p:nvSpPr>
@@ -13422,7 +14283,7 @@
       </p:sp>
       <p:sp>
         <p:nvSpPr>
-          <p:cNvPr id="8" name="Text 6"/>
+          <p:cNvPr id="10" name="Text 7"/>
           <p:cNvSpPr txBox="1"/>
           <p:nvPr/>
         </p:nvSpPr>
@@ -13461,7 +14322,7 @@
       </p:sp>
       <p:sp>
         <p:nvSpPr>
-          <p:cNvPr id="9" name="Text 7"/>
+          <p:cNvPr id="11" name="Text 8"/>
           <p:cNvSpPr txBox="1"/>
           <p:nvPr/>
         </p:nvSpPr>
@@ -13500,7 +14361,7 @@
       </p:sp>
       <p:sp>
         <p:nvSpPr>
-          <p:cNvPr id="10" name="Text 8"/>
+          <p:cNvPr id="12" name="Text 9"/>
           <p:cNvSpPr txBox="1"/>
           <p:nvPr/>
         </p:nvSpPr>
@@ -13539,7 +14400,7 @@
       </p:sp>
       <p:sp>
         <p:nvSpPr>
-          <p:cNvPr id="11" name="Shape 9"/>
+          <p:cNvPr id="13" name="Shape 10"/>
           <p:cNvSpPr/>
           <p:nvPr/>
         </p:nvSpPr>
@@ -13566,7 +14427,7 @@
       </p:sp>
       <p:sp>
         <p:nvSpPr>
-          <p:cNvPr id="12" name="Text 10"/>
+          <p:cNvPr id="14" name="Text 11"/>
           <p:cNvSpPr txBox="1"/>
           <p:nvPr/>
         </p:nvSpPr>
@@ -13605,7 +14466,7 @@
       </p:sp>
       <p:sp>
         <p:nvSpPr>
-          <p:cNvPr id="13" name="Text 11"/>
+          <p:cNvPr id="15" name="Text 12"/>
           <p:cNvSpPr txBox="1"/>
           <p:nvPr/>
         </p:nvSpPr>
@@ -13644,7 +14505,7 @@
       </p:sp>
       <p:sp>
         <p:nvSpPr>
-          <p:cNvPr id="14" name="Text 12"/>
+          <p:cNvPr id="16" name="Text 13"/>
           <p:cNvSpPr txBox="1"/>
           <p:nvPr/>
         </p:nvSpPr>
@@ -13683,7 +14544,7 @@
       </p:sp>
       <p:sp>
         <p:nvSpPr>
-          <p:cNvPr id="15" name="Shape 13"/>
+          <p:cNvPr id="17" name="Shape 14"/>
           <p:cNvSpPr/>
           <p:nvPr/>
         </p:nvSpPr>
@@ -13710,7 +14571,7 @@
       </p:sp>
       <p:sp>
         <p:nvSpPr>
-          <p:cNvPr id="16" name="Text 14"/>
+          <p:cNvPr id="18" name="Text 15"/>
           <p:cNvSpPr txBox="1"/>
           <p:nvPr/>
         </p:nvSpPr>
@@ -13749,7 +14610,7 @@
       </p:sp>
       <p:sp>
         <p:nvSpPr>
-          <p:cNvPr id="17" name="Text 15"/>
+          <p:cNvPr id="19" name="Text 16"/>
           <p:cNvSpPr txBox="1"/>
           <p:nvPr/>
         </p:nvSpPr>
@@ -13788,7 +14649,7 @@
       </p:sp>
       <p:sp>
         <p:nvSpPr>
-          <p:cNvPr id="18" name="Text 16"/>
+          <p:cNvPr id="20" name="Text 17"/>
           <p:cNvSpPr txBox="1"/>
           <p:nvPr/>
         </p:nvSpPr>
@@ -13827,7 +14688,7 @@
       </p:sp>
       <p:sp>
         <p:nvSpPr>
-          <p:cNvPr id="19" name="Shape 17"/>
+          <p:cNvPr id="21" name="Shape 18"/>
           <p:cNvSpPr/>
           <p:nvPr/>
         </p:nvSpPr>
@@ -13854,7 +14715,7 @@
       </p:sp>
       <p:sp>
         <p:nvSpPr>
-          <p:cNvPr id="20" name="Text 18"/>
+          <p:cNvPr id="22" name="Text 19"/>
           <p:cNvSpPr txBox="1"/>
           <p:nvPr/>
         </p:nvSpPr>
@@ -13893,7 +14754,7 @@
       </p:sp>
       <p:sp>
         <p:nvSpPr>
-          <p:cNvPr id="21" name="Text 19"/>
+          <p:cNvPr id="23" name="Text 20"/>
           <p:cNvSpPr txBox="1"/>
           <p:nvPr/>
         </p:nvSpPr>
@@ -13932,7 +14793,7 @@
       </p:sp>
       <p:sp>
         <p:nvSpPr>
-          <p:cNvPr id="22" name="Text 20"/>
+          <p:cNvPr id="24" name="Text 21"/>
           <p:cNvSpPr txBox="1"/>
           <p:nvPr/>
         </p:nvSpPr>
@@ -13971,7 +14832,7 @@
       </p:sp>
       <p:sp>
         <p:nvSpPr>
-          <p:cNvPr id="23" name="Shape 21"/>
+          <p:cNvPr id="25" name="Shape 22"/>
           <p:cNvSpPr/>
           <p:nvPr/>
         </p:nvSpPr>
@@ -13998,7 +14859,7 @@
       </p:sp>
       <p:sp>
         <p:nvSpPr>
-          <p:cNvPr id="24" name="Text 22"/>
+          <p:cNvPr id="26" name="Text 23"/>
           <p:cNvSpPr txBox="1"/>
           <p:nvPr/>
         </p:nvSpPr>
@@ -14037,7 +14898,7 @@
       </p:sp>
       <p:sp>
         <p:nvSpPr>
-          <p:cNvPr id="25" name="Text 23"/>
+          <p:cNvPr id="27" name="Text 24"/>
           <p:cNvSpPr txBox="1"/>
           <p:nvPr/>
         </p:nvSpPr>
@@ -14076,7 +14937,7 @@
       </p:sp>
       <p:sp>
         <p:nvSpPr>
-          <p:cNvPr id="26" name="Text 24"/>
+          <p:cNvPr id="28" name="Text 25"/>
           <p:cNvSpPr txBox="1"/>
           <p:nvPr/>
         </p:nvSpPr>
@@ -14115,7 +14976,7 @@
       </p:sp>
       <p:sp>
         <p:nvSpPr>
-          <p:cNvPr id="27" name="Shape 25"/>
+          <p:cNvPr id="29" name="Shape 26"/>
           <p:cNvSpPr/>
           <p:nvPr/>
         </p:nvSpPr>
@@ -14142,7 +15003,7 @@
       </p:sp>
       <p:sp>
         <p:nvSpPr>
-          <p:cNvPr id="28" name="Text 26"/>
+          <p:cNvPr id="30" name="Text 27"/>
           <p:cNvSpPr txBox="1"/>
           <p:nvPr/>
         </p:nvSpPr>
@@ -14181,7 +15042,7 @@
       </p:sp>
       <p:sp>
         <p:nvSpPr>
-          <p:cNvPr id="29" name="Text 27"/>
+          <p:cNvPr id="31" name="Text 28"/>
           <p:cNvSpPr txBox="1"/>
           <p:nvPr/>
         </p:nvSpPr>
@@ -14220,7 +15081,7 @@
       </p:sp>
       <p:sp>
         <p:nvSpPr>
-          <p:cNvPr id="30" name="Text 28"/>
+          <p:cNvPr id="32" name="Text 29"/>
           <p:cNvSpPr txBox="1"/>
           <p:nvPr/>
         </p:nvSpPr>
@@ -14259,7 +15120,7 @@
       </p:sp>
       <p:sp>
         <p:nvSpPr>
-          <p:cNvPr id="31" name="Shape 29"/>
+          <p:cNvPr id="33" name="Shape 30"/>
           <p:cNvSpPr/>
           <p:nvPr/>
         </p:nvSpPr>
@@ -14286,7 +15147,7 @@
       </p:sp>
       <p:sp>
         <p:nvSpPr>
-          <p:cNvPr id="32" name="Shape 30"/>
+          <p:cNvPr id="34" name="Shape 31"/>
           <p:cNvSpPr/>
           <p:nvPr/>
         </p:nvSpPr>
@@ -14306,7 +15167,7 @@
       </p:sp>
       <p:sp>
         <p:nvSpPr>
-          <p:cNvPr id="33" name="Text 31"/>
+          <p:cNvPr id="35" name="Text 32"/>
           <p:cNvSpPr txBox="1"/>
           <p:nvPr/>
         </p:nvSpPr>
@@ -14345,7 +15206,7 @@
       </p:sp>
       <p:sp>
         <p:nvSpPr>
-          <p:cNvPr id="34" name="Text 32"/>
+          <p:cNvPr id="36" name="Text 33"/>
           <p:cNvSpPr txBox="1"/>
           <p:nvPr/>
         </p:nvSpPr>
@@ -14407,7 +15268,7 @@
       </p:sp>
       <p:sp>
         <p:nvSpPr>
-          <p:cNvPr id="35" name="Shape 33"/>
+          <p:cNvPr id="37" name="Shape 34"/>
           <p:cNvSpPr/>
           <p:nvPr/>
         </p:nvSpPr>
@@ -14434,7 +15295,7 @@
       </p:sp>
       <p:sp>
         <p:nvSpPr>
-          <p:cNvPr id="36" name="Shape 34"/>
+          <p:cNvPr id="38" name="Shape 35"/>
           <p:cNvSpPr/>
           <p:nvPr/>
         </p:nvSpPr>
@@ -14454,7 +15315,7 @@
       </p:sp>
       <p:sp>
         <p:nvSpPr>
-          <p:cNvPr id="37" name="Text 35"/>
+          <p:cNvPr id="39" name="Text 36"/>
           <p:cNvSpPr txBox="1"/>
           <p:nvPr/>
         </p:nvSpPr>
@@ -14493,7 +15354,7 @@
       </p:sp>
       <p:sp>
         <p:nvSpPr>
-          <p:cNvPr id="38" name="Text 36"/>
+          <p:cNvPr id="40" name="Text 37"/>
           <p:cNvSpPr txBox="1"/>
           <p:nvPr/>
         </p:nvSpPr>
@@ -14555,7 +15416,7 @@
       </p:sp>
       <p:sp>
         <p:nvSpPr>
-          <p:cNvPr id="39" name="Shape 37"/>
+          <p:cNvPr id="41" name="Shape 38"/>
           <p:cNvSpPr/>
           <p:nvPr/>
         </p:nvSpPr>
@@ -14582,7 +15443,7 @@
       </p:sp>
       <p:sp>
         <p:nvSpPr>
-          <p:cNvPr id="40" name="Shape 38"/>
+          <p:cNvPr id="42" name="Shape 39"/>
           <p:cNvSpPr/>
           <p:nvPr/>
         </p:nvSpPr>
@@ -14602,7 +15463,7 @@
       </p:sp>
       <p:sp>
         <p:nvSpPr>
-          <p:cNvPr id="41" name="Text 39"/>
+          <p:cNvPr id="43" name="Text 40"/>
           <p:cNvSpPr txBox="1"/>
           <p:nvPr/>
         </p:nvSpPr>
@@ -14641,7 +15502,7 @@
       </p:sp>
       <p:sp>
         <p:nvSpPr>
-          <p:cNvPr id="42" name="Text 40"/>
+          <p:cNvPr id="44" name="Text 41"/>
           <p:cNvSpPr txBox="1"/>
           <p:nvPr/>
         </p:nvSpPr>
@@ -14733,9 +15594,72 @@
           <a:chExt cx="0" cy="0"/>
         </a:xfrm>
       </p:grpSpPr>
-      <p:sp>
-        <p:nvSpPr>
-          <p:cNvPr id="2" name="Shape 0"/>
+      <p:pic>
+        <p:nvPicPr>
+          <p:cNvPr id="2" name="Image 0" descr="/sessions/compassionate-sweet-heisenberg/mnt/dev-aspath-life-main/tools/assets/logo-deck.png">    </p:cNvPr>
+          <p:cNvPicPr>
+            <a:picLocks noChangeAspect="1"/>
+          </p:cNvPicPr>
+          <p:nvPr/>
+        </p:nvPicPr>
+        <p:blipFill>
+          <a:blip r:embed="rId1"/>
+          <a:stretch>
+            <a:fillRect/>
+          </a:stretch>
+        </p:blipFill>
+        <p:spPr>
+          <a:xfrm>
+            <a:off x="11458173" y="109728"/>
+            <a:ext cx="209571" cy="256032"/>
+          </a:xfrm>
+          <a:prstGeom prst="rect">
+            <a:avLst/>
+          </a:prstGeom>
+        </p:spPr>
+      </p:pic>
+      <p:sp>
+        <p:nvSpPr>
+          <p:cNvPr id="3" name="Text 0"/>
+          <p:cNvSpPr txBox="1"/>
+          <p:nvPr/>
+        </p:nvSpPr>
+        <p:spPr>
+          <a:xfrm>
+            <a:off x="8623533" y="128016"/>
+            <a:ext cx="2743200" cy="237744"/>
+          </a:xfrm>
+          <a:prstGeom prst="rect">
+            <a:avLst/>
+          </a:prstGeom>
+          <a:noFill/>
+          <a:ln/>
+        </p:spPr>
+        <p:txBody>
+          <a:bodyPr wrap="square" lIns="0" tIns="0" rIns="0" bIns="0" rtlCol="0" anchor="ctr"/>
+          <a:lstStyle/>
+          <a:p>
+            <a:pPr algn="r" indent="0" marL="0">
+              <a:buNone/>
+            </a:pPr>
+            <a:r>
+              <a:rPr lang="en-US" sz="750" dirty="0">
+                <a:solidFill>
+                  <a:srgbClr val="97A9AF"/>
+                </a:solidFill>
+                <a:latin typeface="Meiryo" pitchFamily="34" charset="0"/>
+                <a:ea typeface="Meiryo" pitchFamily="34" charset="-122"/>
+                <a:cs typeface="Meiryo" pitchFamily="34" charset="-120"/>
+              </a:rPr>
+              <a:t>鹿児島のパーキンソン病専門トレーニングスタジオ</a:t>
+            </a:r>
+            <a:endParaRPr lang="en-US" sz="750" dirty="0"/>
+          </a:p>
+        </p:txBody>
+      </p:sp>
+      <p:sp>
+        <p:nvSpPr>
+          <p:cNvPr id="4" name="Shape 1"/>
           <p:cNvSpPr/>
           <p:nvPr/>
         </p:nvSpPr>
@@ -14757,7 +15681,7 @@
       </p:sp>
       <p:sp>
         <p:nvSpPr>
-          <p:cNvPr id="3" name="Text 1"/>
+          <p:cNvPr id="5" name="Text 2"/>
           <p:cNvSpPr txBox="1"/>
           <p:nvPr/>
         </p:nvSpPr>
@@ -14796,7 +15720,7 @@
       </p:sp>
       <p:sp>
         <p:nvSpPr>
-          <p:cNvPr id="4" name="Text 2"/>
+          <p:cNvPr id="6" name="Text 3"/>
           <p:cNvSpPr txBox="1"/>
           <p:nvPr/>
         </p:nvSpPr>
@@ -14835,7 +15759,7 @@
       </p:sp>
       <p:sp>
         <p:nvSpPr>
-          <p:cNvPr id="5" name="Text 3"/>
+          <p:cNvPr id="7" name="Text 4"/>
           <p:cNvSpPr txBox="1"/>
           <p:nvPr/>
         </p:nvSpPr>
@@ -14874,7 +15798,7 @@
       </p:sp>
       <p:sp>
         <p:nvSpPr>
-          <p:cNvPr id="6" name="Text 4"/>
+          <p:cNvPr id="8" name="Text 5"/>
           <p:cNvSpPr txBox="1"/>
           <p:nvPr/>
         </p:nvSpPr>
@@ -14913,7 +15837,7 @@
       </p:sp>
       <p:sp>
         <p:nvSpPr>
-          <p:cNvPr id="7" name="Shape 5"/>
+          <p:cNvPr id="9" name="Shape 6"/>
           <p:cNvSpPr/>
           <p:nvPr/>
         </p:nvSpPr>
@@ -14940,7 +15864,7 @@
       </p:sp>
       <p:sp>
         <p:nvSpPr>
-          <p:cNvPr id="8" name="Shape 6"/>
+          <p:cNvPr id="10" name="Shape 7"/>
           <p:cNvSpPr/>
           <p:nvPr/>
         </p:nvSpPr>
@@ -14960,7 +15884,7 @@
       </p:sp>
       <p:sp>
         <p:nvSpPr>
-          <p:cNvPr id="9" name="Text 7"/>
+          <p:cNvPr id="11" name="Text 8"/>
           <p:cNvSpPr txBox="1"/>
           <p:nvPr/>
         </p:nvSpPr>
@@ -14999,7 +15923,7 @@
       </p:sp>
       <p:sp>
         <p:nvSpPr>
-          <p:cNvPr id="10" name="Text 8"/>
+          <p:cNvPr id="12" name="Text 9"/>
           <p:cNvSpPr txBox="1"/>
           <p:nvPr/>
         </p:nvSpPr>
@@ -15038,7 +15962,7 @@
       </p:sp>
       <p:sp>
         <p:nvSpPr>
-          <p:cNvPr id="11" name="Text 9"/>
+          <p:cNvPr id="13" name="Text 10"/>
           <p:cNvSpPr txBox="1"/>
           <p:nvPr/>
         </p:nvSpPr>
@@ -15100,7 +16024,7 @@
       </p:sp>
       <p:sp>
         <p:nvSpPr>
-          <p:cNvPr id="12" name="Text 10"/>
+          <p:cNvPr id="14" name="Text 11"/>
           <p:cNvSpPr txBox="1"/>
           <p:nvPr/>
         </p:nvSpPr>
@@ -15139,7 +16063,7 @@
       </p:sp>
       <p:sp>
         <p:nvSpPr>
-          <p:cNvPr id="13" name="Shape 11"/>
+          <p:cNvPr id="15" name="Shape 12"/>
           <p:cNvSpPr/>
           <p:nvPr/>
         </p:nvSpPr>
@@ -15166,7 +16090,7 @@
       </p:sp>
       <p:sp>
         <p:nvSpPr>
-          <p:cNvPr id="14" name="Shape 12"/>
+          <p:cNvPr id="16" name="Shape 13"/>
           <p:cNvSpPr/>
           <p:nvPr/>
         </p:nvSpPr>
@@ -15186,7 +16110,7 @@
       </p:sp>
       <p:sp>
         <p:nvSpPr>
-          <p:cNvPr id="15" name="Text 13"/>
+          <p:cNvPr id="17" name="Text 14"/>
           <p:cNvSpPr txBox="1"/>
           <p:nvPr/>
         </p:nvSpPr>
@@ -15225,7 +16149,7 @@
       </p:sp>
       <p:sp>
         <p:nvSpPr>
-          <p:cNvPr id="16" name="Text 14"/>
+          <p:cNvPr id="18" name="Text 15"/>
           <p:cNvSpPr txBox="1"/>
           <p:nvPr/>
         </p:nvSpPr>
@@ -15264,7 +16188,7 @@
       </p:sp>
       <p:sp>
         <p:nvSpPr>
-          <p:cNvPr id="17" name="Text 15"/>
+          <p:cNvPr id="19" name="Text 16"/>
           <p:cNvSpPr txBox="1"/>
           <p:nvPr/>
         </p:nvSpPr>
@@ -15306,7 +16230,7 @@
       </p:sp>
       <p:sp>
         <p:nvSpPr>
-          <p:cNvPr id="18" name="Text 16"/>
+          <p:cNvPr id="20" name="Text 17"/>
           <p:cNvSpPr txBox="1"/>
           <p:nvPr/>
         </p:nvSpPr>
@@ -15345,7 +16269,7 @@
       </p:sp>
       <p:sp>
         <p:nvSpPr>
-          <p:cNvPr id="19" name="Shape 17"/>
+          <p:cNvPr id="21" name="Shape 18"/>
           <p:cNvSpPr/>
           <p:nvPr/>
         </p:nvSpPr>
@@ -15372,7 +16296,7 @@
       </p:sp>
       <p:sp>
         <p:nvSpPr>
-          <p:cNvPr id="20" name="Shape 18"/>
+          <p:cNvPr id="22" name="Shape 19"/>
           <p:cNvSpPr/>
           <p:nvPr/>
         </p:nvSpPr>
@@ -15392,7 +16316,7 @@
       </p:sp>
       <p:sp>
         <p:nvSpPr>
-          <p:cNvPr id="21" name="Text 19"/>
+          <p:cNvPr id="23" name="Text 20"/>
           <p:cNvSpPr txBox="1"/>
           <p:nvPr/>
         </p:nvSpPr>
@@ -15431,7 +16355,7 @@
       </p:sp>
       <p:sp>
         <p:nvSpPr>
-          <p:cNvPr id="22" name="Text 20"/>
+          <p:cNvPr id="24" name="Text 21"/>
           <p:cNvSpPr txBox="1"/>
           <p:nvPr/>
         </p:nvSpPr>
@@ -15470,7 +16394,7 @@
       </p:sp>
       <p:sp>
         <p:nvSpPr>
-          <p:cNvPr id="23" name="Text 21"/>
+          <p:cNvPr id="25" name="Text 22"/>
           <p:cNvSpPr txBox="1"/>
           <p:nvPr/>
         </p:nvSpPr>
@@ -15532,7 +16456,7 @@
       </p:sp>
       <p:sp>
         <p:nvSpPr>
-          <p:cNvPr id="24" name="Text 22"/>
+          <p:cNvPr id="26" name="Text 23"/>
           <p:cNvSpPr txBox="1"/>
           <p:nvPr/>
         </p:nvSpPr>
@@ -15571,14 +16495,14 @@
       </p:sp>
       <p:pic>
         <p:nvPicPr>
-          <p:cNvPr id="25" name="Image 0" descr="/sessions/compassionate-sweet-heisenberg/mnt/dev-aspath-life-main/_wp移行素材/★引継ぎ資料/画像/06_キャッシュ削除.jpg">    </p:cNvPr>
+          <p:cNvPr id="27" name="Image 1" descr="/sessions/compassionate-sweet-heisenberg/mnt/dev-aspath-life-main/_wp移行素材/★引継ぎ資料/画像/06_キャッシュ削除.jpg">    </p:cNvPr>
           <p:cNvPicPr>
             <a:picLocks noChangeAspect="1"/>
           </p:cNvPicPr>
           <p:nvPr/>
         </p:nvPicPr>
         <p:blipFill>
-          <a:blip r:embed="rId1"/>
+          <a:blip r:embed="rId2"/>
           <a:stretch>
             <a:fillRect/>
           </a:stretch>
@@ -15595,7 +16519,7 @@
       </p:pic>
       <p:sp>
         <p:nvSpPr>
-          <p:cNvPr id="26" name="Shape 23"/>
+          <p:cNvPr id="28" name="Shape 24"/>
           <p:cNvSpPr/>
           <p:nvPr/>
         </p:nvSpPr>
@@ -15622,7 +16546,7 @@
       </p:sp>
       <p:sp>
         <p:nvSpPr>
-          <p:cNvPr id="27" name="Shape 24"/>
+          <p:cNvPr id="29" name="Shape 25"/>
           <p:cNvSpPr/>
           <p:nvPr/>
         </p:nvSpPr>
@@ -15649,7 +16573,7 @@
       </p:sp>
       <p:sp>
         <p:nvSpPr>
-          <p:cNvPr id="28" name="Shape 25"/>
+          <p:cNvPr id="30" name="Shape 26"/>
           <p:cNvSpPr/>
           <p:nvPr/>
         </p:nvSpPr>
@@ -15669,7 +16593,7 @@
       </p:sp>
       <p:sp>
         <p:nvSpPr>
-          <p:cNvPr id="29" name="Text 26"/>
+          <p:cNvPr id="31" name="Text 27"/>
           <p:cNvSpPr txBox="1"/>
           <p:nvPr/>
         </p:nvSpPr>
@@ -15708,7 +16632,7 @@
       </p:sp>
       <p:sp>
         <p:nvSpPr>
-          <p:cNvPr id="30" name="Text 27"/>
+          <p:cNvPr id="32" name="Text 28"/>
           <p:cNvSpPr txBox="1"/>
           <p:nvPr/>
         </p:nvSpPr>
@@ -15770,7 +16694,7 @@
       </p:sp>
       <p:sp>
         <p:nvSpPr>
-          <p:cNvPr id="31" name="Shape 28"/>
+          <p:cNvPr id="33" name="Shape 29"/>
           <p:cNvSpPr/>
           <p:nvPr/>
         </p:nvSpPr>
@@ -15797,7 +16721,7 @@
       </p:sp>
       <p:sp>
         <p:nvSpPr>
-          <p:cNvPr id="32" name="Shape 29"/>
+          <p:cNvPr id="34" name="Shape 30"/>
           <p:cNvSpPr/>
           <p:nvPr/>
         </p:nvSpPr>
@@ -15817,7 +16741,7 @@
       </p:sp>
       <p:sp>
         <p:nvSpPr>
-          <p:cNvPr id="33" name="Text 30"/>
+          <p:cNvPr id="35" name="Text 31"/>
           <p:cNvSpPr txBox="1"/>
           <p:nvPr/>
         </p:nvSpPr>
@@ -15856,7 +16780,7 @@
       </p:sp>
       <p:sp>
         <p:nvSpPr>
-          <p:cNvPr id="34" name="Text 31"/>
+          <p:cNvPr id="36" name="Text 32"/>
           <p:cNvSpPr txBox="1"/>
           <p:nvPr/>
         </p:nvSpPr>
